--- a/topic07-methods/unit-1/talk-2-bespoke-methods/bespoke-methods.pptx
+++ b/topic07-methods/unit-1/talk-2-bespoke-methods/bespoke-methods.pptx
@@ -2,10 +2,10 @@
 <file path=ppt/presentation.xml><?xml version="1.0" encoding="utf-8"?>
 <p:presentation xmlns:a="http://schemas.openxmlformats.org/drawingml/2006/main" xmlns:r="http://schemas.openxmlformats.org/officeDocument/2006/relationships" xmlns:p="http://schemas.openxmlformats.org/presentationml/2006/main" saveSubsetFonts="1">
   <p:sldMasterIdLst>
-    <p:sldMasterId id="2147483648" r:id="rId1"/>
+    <p:sldMasterId id="2147483660" r:id="rId1"/>
   </p:sldMasterIdLst>
   <p:notesMasterIdLst>
-    <p:notesMasterId r:id="rId21"/>
+    <p:notesMasterId r:id="rId20"/>
   </p:notesMasterIdLst>
   <p:sldIdLst>
     <p:sldId id="256" r:id="rId2"/>
@@ -25,8 +25,7 @@
     <p:sldId id="448" r:id="rId16"/>
     <p:sldId id="432" r:id="rId17"/>
     <p:sldId id="442" r:id="rId18"/>
-    <p:sldId id="449" r:id="rId19"/>
-    <p:sldId id="273" r:id="rId20"/>
+    <p:sldId id="273" r:id="rId19"/>
   </p:sldIdLst>
   <p:sldSz cx="12192000" cy="6858000"/>
   <p:notesSz cx="6858000" cy="9144000"/>
@@ -226,7 +225,7 @@
           <a:p>
             <a:fld id="{58C3D141-1E1C-433C-AD3A-CD56CBBB4F9F}" type="datetimeFigureOut">
               <a:rPr lang="en-IE" smtClean="0"/>
-              <a:t>09/10/2025</a:t>
+              <a:t>30/10/2025</a:t>
             </a:fld>
             <a:endParaRPr lang="en-IE"/>
           </a:p>
@@ -1026,120 +1025,6 @@
           <a:bodyPr/>
           <a:lstStyle/>
           <a:p>
-            <a:r>
-              <a:rPr lang="en-IE" dirty="0"/>
-              <a:t>void setup()</a:t>
-            </a:r>
-          </a:p>
-          <a:p>
-            <a:r>
-              <a:rPr lang="en-IE" dirty="0"/>
-              <a:t>{</a:t>
-            </a:r>
-          </a:p>
-          <a:p>
-            <a:r>
-              <a:rPr lang="en-IE" dirty="0"/>
-              <a:t>  size(200,200);</a:t>
-            </a:r>
-          </a:p>
-          <a:p>
-            <a:r>
-              <a:rPr lang="en-IE" dirty="0"/>
-              <a:t>  background(20,70,105);</a:t>
-            </a:r>
-          </a:p>
-          <a:p>
-            <a:r>
-              <a:rPr lang="en-IE" dirty="0"/>
-              <a:t>}</a:t>
-            </a:r>
-          </a:p>
-          <a:p>
-            <a:endParaRPr lang="en-IE" dirty="0"/>
-          </a:p>
-          <a:p>
-            <a:r>
-              <a:rPr lang="en-IE" dirty="0"/>
-              <a:t>void draw()</a:t>
-            </a:r>
-          </a:p>
-          <a:p>
-            <a:r>
-              <a:rPr lang="en-IE" dirty="0"/>
-              <a:t>{</a:t>
-            </a:r>
-          </a:p>
-          <a:p>
-            <a:r>
-              <a:rPr lang="en-IE" dirty="0"/>
-              <a:t>   </a:t>
-            </a:r>
-            <a:r>
-              <a:rPr lang="en-IE" dirty="0" err="1"/>
-              <a:t>drawRedSquare</a:t>
-            </a:r>
-            <a:r>
-              <a:rPr lang="en-IE" dirty="0"/>
-              <a:t>(60);</a:t>
-            </a:r>
-          </a:p>
-          <a:p>
-            <a:r>
-              <a:rPr lang="en-IE" dirty="0"/>
-              <a:t>}</a:t>
-            </a:r>
-          </a:p>
-          <a:p>
-            <a:endParaRPr lang="en-IE" dirty="0"/>
-          </a:p>
-          <a:p>
-            <a:r>
-              <a:rPr lang="en-IE" dirty="0"/>
-              <a:t>void </a:t>
-            </a:r>
-            <a:r>
-              <a:rPr lang="en-IE" dirty="0" err="1"/>
-              <a:t>drawRedSquare</a:t>
-            </a:r>
-            <a:r>
-              <a:rPr lang="en-IE" dirty="0"/>
-              <a:t>(</a:t>
-            </a:r>
-            <a:r>
-              <a:rPr lang="en-IE" dirty="0" err="1"/>
-              <a:t>int</a:t>
-            </a:r>
-            <a:r>
-              <a:rPr lang="en-IE" dirty="0"/>
-              <a:t> length)</a:t>
-            </a:r>
-          </a:p>
-          <a:p>
-            <a:r>
-              <a:rPr lang="en-IE" dirty="0"/>
-              <a:t>{</a:t>
-            </a:r>
-          </a:p>
-          <a:p>
-            <a:r>
-              <a:rPr lang="en-IE" dirty="0"/>
-              <a:t>  fill(255,0,0);</a:t>
-            </a:r>
-          </a:p>
-          <a:p>
-            <a:r>
-              <a:rPr lang="en-IE" dirty="0"/>
-              <a:t>  square(70,70,length, length);</a:t>
-            </a:r>
-          </a:p>
-          <a:p>
-            <a:r>
-              <a:rPr lang="en-IE" dirty="0"/>
-              <a:t>}</a:t>
-            </a:r>
-          </a:p>
-          <a:p>
             <a:endParaRPr lang="en-IE" dirty="0"/>
           </a:p>
         </p:txBody>
@@ -1464,9 +1349,10 @@
           <a:lstStyle/>
           <a:p>
             <a:r>
-              <a:rPr lang="en-US" dirty="0"/>
+              <a:rPr lang="en-GB"/>
               <a:t>Click to edit Master title style</a:t>
             </a:r>
+            <a:endParaRPr lang="en-US" dirty="0"/>
           </a:p>
         </p:txBody>
       </p:sp>
@@ -1582,9 +1468,10 @@
           </a:lstStyle>
           <a:p>
             <a:r>
-              <a:rPr lang="en-US" dirty="0"/>
+              <a:rPr lang="en-GB"/>
               <a:t>Click to edit Master subtitle style</a:t>
             </a:r>
+            <a:endParaRPr lang="en-US" dirty="0"/>
           </a:p>
         </p:txBody>
       </p:sp>
@@ -1606,7 +1493,7 @@
             <a:fld id="{1D8BD707-D9CF-40AE-B4C6-C98DA3205C09}" type="datetimeFigureOut">
               <a:rPr lang="en-US" smtClean="0"/>
               <a:pPr/>
-              <a:t>10/9/2025</a:t>
+              <a:t>10/30/25</a:t>
             </a:fld>
             <a:endParaRPr lang="en-US"/>
           </a:p>
@@ -1656,6 +1543,11 @@
         </p:txBody>
       </p:sp>
     </p:spTree>
+    <p:extLst>
+      <p:ext uri="{BB962C8B-B14F-4D97-AF65-F5344CB8AC3E}">
+        <p14:creationId xmlns:p14="http://schemas.microsoft.com/office/powerpoint/2010/main" val="1891622873"/>
+      </p:ext>
+    </p:extLst>
   </p:cSld>
   <p:clrMapOvr>
     <a:masterClrMapping/>
@@ -1696,9 +1588,10 @@
           <a:lstStyle/>
           <a:p>
             <a:r>
-              <a:rPr lang="en-US"/>
+              <a:rPr lang="en-GB"/>
               <a:t>Click to edit Master title style</a:t>
             </a:r>
+            <a:endParaRPr lang="en-US"/>
           </a:p>
         </p:txBody>
       </p:sp>
@@ -1719,37 +1612,38 @@
           <a:p>
             <a:pPr lvl="0"/>
             <a:r>
-              <a:rPr lang="en-US"/>
+              <a:rPr lang="en-GB"/>
               <a:t>Click to edit Master text styles</a:t>
             </a:r>
           </a:p>
           <a:p>
             <a:pPr lvl="1"/>
             <a:r>
-              <a:rPr lang="en-US"/>
+              <a:rPr lang="en-GB"/>
               <a:t>Second level</a:t>
             </a:r>
           </a:p>
           <a:p>
             <a:pPr lvl="2"/>
             <a:r>
-              <a:rPr lang="en-US"/>
+              <a:rPr lang="en-GB"/>
               <a:t>Third level</a:t>
             </a:r>
           </a:p>
           <a:p>
             <a:pPr lvl="3"/>
             <a:r>
-              <a:rPr lang="en-US"/>
+              <a:rPr lang="en-GB"/>
               <a:t>Fourth level</a:t>
             </a:r>
           </a:p>
           <a:p>
             <a:pPr lvl="4"/>
             <a:r>
-              <a:rPr lang="en-US"/>
+              <a:rPr lang="en-GB"/>
               <a:t>Fifth level</a:t>
             </a:r>
+            <a:endParaRPr lang="en-US"/>
           </a:p>
         </p:txBody>
       </p:sp>
@@ -1771,7 +1665,7 @@
             <a:fld id="{1D8BD707-D9CF-40AE-B4C6-C98DA3205C09}" type="datetimeFigureOut">
               <a:rPr lang="en-US" smtClean="0"/>
               <a:pPr/>
-              <a:t>10/9/2025</a:t>
+              <a:t>10/30/25</a:t>
             </a:fld>
             <a:endParaRPr lang="en-US"/>
           </a:p>
@@ -1821,6 +1715,11 @@
         </p:txBody>
       </p:sp>
     </p:spTree>
+    <p:extLst>
+      <p:ext uri="{BB962C8B-B14F-4D97-AF65-F5344CB8AC3E}">
+        <p14:creationId xmlns:p14="http://schemas.microsoft.com/office/powerpoint/2010/main" val="3303184895"/>
+      </p:ext>
+    </p:extLst>
   </p:cSld>
   <p:clrMapOvr>
     <a:masterClrMapping/>
@@ -1866,9 +1765,10 @@
           <a:lstStyle/>
           <a:p>
             <a:r>
-              <a:rPr lang="en-US"/>
+              <a:rPr lang="en-GB"/>
               <a:t>Click to edit Master title style</a:t>
             </a:r>
+            <a:endParaRPr lang="en-US"/>
           </a:p>
         </p:txBody>
       </p:sp>
@@ -1894,37 +1794,38 @@
           <a:p>
             <a:pPr lvl="0"/>
             <a:r>
-              <a:rPr lang="en-US"/>
+              <a:rPr lang="en-GB"/>
               <a:t>Click to edit Master text styles</a:t>
             </a:r>
           </a:p>
           <a:p>
             <a:pPr lvl="1"/>
             <a:r>
-              <a:rPr lang="en-US"/>
+              <a:rPr lang="en-GB"/>
               <a:t>Second level</a:t>
             </a:r>
           </a:p>
           <a:p>
             <a:pPr lvl="2"/>
             <a:r>
-              <a:rPr lang="en-US"/>
+              <a:rPr lang="en-GB"/>
               <a:t>Third level</a:t>
             </a:r>
           </a:p>
           <a:p>
             <a:pPr lvl="3"/>
             <a:r>
-              <a:rPr lang="en-US"/>
+              <a:rPr lang="en-GB"/>
               <a:t>Fourth level</a:t>
             </a:r>
           </a:p>
           <a:p>
             <a:pPr lvl="4"/>
             <a:r>
-              <a:rPr lang="en-US"/>
+              <a:rPr lang="en-GB"/>
               <a:t>Fifth level</a:t>
             </a:r>
+            <a:endParaRPr lang="en-US"/>
           </a:p>
         </p:txBody>
       </p:sp>
@@ -1946,7 +1847,7 @@
             <a:fld id="{1D8BD707-D9CF-40AE-B4C6-C98DA3205C09}" type="datetimeFigureOut">
               <a:rPr lang="en-US" smtClean="0"/>
               <a:pPr/>
-              <a:t>10/9/2025</a:t>
+              <a:t>10/30/25</a:t>
             </a:fld>
             <a:endParaRPr lang="en-US"/>
           </a:p>
@@ -1996,6 +1897,561 @@
         </p:txBody>
       </p:sp>
     </p:spTree>
+    <p:extLst>
+      <p:ext uri="{BB962C8B-B14F-4D97-AF65-F5344CB8AC3E}">
+        <p14:creationId xmlns:p14="http://schemas.microsoft.com/office/powerpoint/2010/main" val="3310452469"/>
+      </p:ext>
+    </p:extLst>
+  </p:cSld>
+  <p:clrMapOvr>
+    <a:masterClrMapping/>
+  </p:clrMapOvr>
+</p:sldLayout>
+</file>
+
+<file path=ppt/slideLayouts/slideLayout12.xml><?xml version="1.0" encoding="utf-8"?>
+<p:sldLayout xmlns:a="http://schemas.openxmlformats.org/drawingml/2006/main" xmlns:r="http://schemas.openxmlformats.org/officeDocument/2006/relationships" xmlns:p="http://schemas.openxmlformats.org/presentationml/2006/main" type="tx">
+  <p:cSld name="Title &amp; Bullets">
+    <p:spTree>
+      <p:nvGrpSpPr>
+        <p:cNvPr id="1" name=""/>
+        <p:cNvGrpSpPr/>
+        <p:nvPr/>
+      </p:nvGrpSpPr>
+      <p:grpSpPr>
+        <a:xfrm>
+          <a:off x="0" y="0"/>
+          <a:ext cx="0" cy="0"/>
+          <a:chOff x="0" y="0"/>
+          <a:chExt cx="0" cy="0"/>
+        </a:xfrm>
+      </p:grpSpPr>
+      <p:sp>
+        <p:nvSpPr>
+          <p:cNvPr id="22" name="Shape 22"/>
+          <p:cNvSpPr>
+            <a:spLocks noGrp="1"/>
+          </p:cNvSpPr>
+          <p:nvPr>
+            <p:ph type="title"/>
+          </p:nvPr>
+        </p:nvSpPr>
+        <p:spPr>
+          <a:prstGeom prst="rect">
+            <a:avLst/>
+          </a:prstGeom>
+        </p:spPr>
+        <p:txBody>
+          <a:bodyPr/>
+          <a:lstStyle/>
+          <a:p>
+            <a:r>
+              <a:rPr lang="en-GB"/>
+              <a:t>Click to edit Master title style</a:t>
+            </a:r>
+            <a:endParaRPr/>
+          </a:p>
+        </p:txBody>
+      </p:sp>
+      <p:sp>
+        <p:nvSpPr>
+          <p:cNvPr id="23" name="Shape 23"/>
+          <p:cNvSpPr>
+            <a:spLocks noGrp="1"/>
+          </p:cNvSpPr>
+          <p:nvPr>
+            <p:ph type="body" idx="1"/>
+          </p:nvPr>
+        </p:nvSpPr>
+        <p:spPr>
+          <a:prstGeom prst="rect">
+            <a:avLst/>
+          </a:prstGeom>
+        </p:spPr>
+        <p:txBody>
+          <a:bodyPr/>
+          <a:lstStyle/>
+          <a:p>
+            <a:pPr lvl="0"/>
+            <a:r>
+              <a:rPr lang="en-GB"/>
+              <a:t>Click to edit Master text styles</a:t>
+            </a:r>
+          </a:p>
+          <a:p>
+            <a:pPr lvl="1"/>
+            <a:r>
+              <a:rPr lang="en-GB"/>
+              <a:t>Second level</a:t>
+            </a:r>
+          </a:p>
+          <a:p>
+            <a:pPr lvl="2"/>
+            <a:r>
+              <a:rPr lang="en-GB"/>
+              <a:t>Third level</a:t>
+            </a:r>
+          </a:p>
+          <a:p>
+            <a:pPr lvl="3"/>
+            <a:r>
+              <a:rPr lang="en-GB"/>
+              <a:t>Fourth level</a:t>
+            </a:r>
+          </a:p>
+          <a:p>
+            <a:pPr lvl="4"/>
+            <a:r>
+              <a:rPr lang="en-GB"/>
+              <a:t>Fifth level</a:t>
+            </a:r>
+            <a:endParaRPr/>
+          </a:p>
+        </p:txBody>
+      </p:sp>
+      <p:sp>
+        <p:nvSpPr>
+          <p:cNvPr id="24" name="Shape 24"/>
+          <p:cNvSpPr>
+            <a:spLocks noGrp="1"/>
+          </p:cNvSpPr>
+          <p:nvPr>
+            <p:ph type="sldNum" sz="quarter" idx="2"/>
+          </p:nvPr>
+        </p:nvSpPr>
+        <p:spPr>
+          <a:prstGeom prst="rect">
+            <a:avLst/>
+          </a:prstGeom>
+        </p:spPr>
+        <p:txBody>
+          <a:bodyPr/>
+          <a:lstStyle/>
+          <a:p>
+            <a:fld id="{B6F15528-21DE-4FAA-801E-634DDDAF4B2B}" type="slidenum">
+              <a:rPr lang="en-US" smtClean="0"/>
+              <a:pPr/>
+              <a:t>‹#›</a:t>
+            </a:fld>
+            <a:endParaRPr lang="en-US"/>
+          </a:p>
+        </p:txBody>
+      </p:sp>
+    </p:spTree>
+    <p:extLst>
+      <p:ext uri="{BB962C8B-B14F-4D97-AF65-F5344CB8AC3E}">
+        <p14:creationId xmlns:p14="http://schemas.microsoft.com/office/powerpoint/2010/main" val="3062974443"/>
+      </p:ext>
+    </p:extLst>
+  </p:cSld>
+  <p:clrMapOvr>
+    <a:masterClrMapping/>
+  </p:clrMapOvr>
+</p:sldLayout>
+</file>
+
+<file path=ppt/slideLayouts/slideLayout13.xml><?xml version="1.0" encoding="utf-8"?>
+<p:sldLayout xmlns:a="http://schemas.openxmlformats.org/drawingml/2006/main" xmlns:r="http://schemas.openxmlformats.org/officeDocument/2006/relationships" xmlns:p="http://schemas.openxmlformats.org/presentationml/2006/main" showMasterSp="0">
+  <p:cSld name="1_Title Slide">
+    <p:spTree>
+      <p:nvGrpSpPr>
+        <p:cNvPr id="1" name=""/>
+        <p:cNvGrpSpPr/>
+        <p:nvPr/>
+      </p:nvGrpSpPr>
+      <p:grpSpPr>
+        <a:xfrm>
+          <a:off x="0" y="0"/>
+          <a:ext cx="0" cy="0"/>
+          <a:chOff x="0" y="0"/>
+          <a:chExt cx="0" cy="0"/>
+        </a:xfrm>
+      </p:grpSpPr>
+      <p:sp>
+        <p:nvSpPr>
+          <p:cNvPr id="15" name="Title Text"/>
+          <p:cNvSpPr txBox="1">
+            <a:spLocks noGrp="1"/>
+          </p:cNvSpPr>
+          <p:nvPr>
+            <p:ph type="title"/>
+          </p:nvPr>
+        </p:nvSpPr>
+        <p:spPr>
+          <a:xfrm>
+            <a:off x="863600" y="2286000"/>
+            <a:ext cx="10464801" cy="1143001"/>
+          </a:xfrm>
+          <a:prstGeom prst="rect">
+            <a:avLst/>
+          </a:prstGeom>
+        </p:spPr>
+        <p:txBody>
+          <a:bodyPr/>
+          <a:lstStyle/>
+          <a:p>
+            <a:r>
+              <a:rPr lang="en-GB"/>
+              <a:t>Click to edit Master title style</a:t>
+            </a:r>
+            <a:endParaRPr dirty="0"/>
+          </a:p>
+        </p:txBody>
+      </p:sp>
+      <p:sp>
+        <p:nvSpPr>
+          <p:cNvPr id="16" name="Subtitle"/>
+          <p:cNvSpPr txBox="1">
+            <a:spLocks noGrp="1"/>
+          </p:cNvSpPr>
+          <p:nvPr>
+            <p:ph type="body" sz="quarter" idx="22"/>
+          </p:nvPr>
+        </p:nvSpPr>
+        <p:spPr>
+          <a:xfrm>
+            <a:off x="957115" y="3465604"/>
+            <a:ext cx="10134430" cy="846384"/>
+          </a:xfrm>
+          <a:prstGeom prst="rect">
+            <a:avLst/>
+          </a:prstGeom>
+        </p:spPr>
+        <p:txBody>
+          <a:bodyPr anchor="ctr">
+            <a:spAutoFit/>
+          </a:bodyPr>
+          <a:lstStyle>
+            <a:lvl1pPr marL="0" indent="0" algn="ctr">
+              <a:spcBef>
+                <a:spcPts val="0"/>
+              </a:spcBef>
+              <a:buClrTx/>
+              <a:buSzTx/>
+              <a:buFontTx/>
+              <a:buNone/>
+              <a:defRPr>
+                <a:solidFill>
+                  <a:srgbClr val="2F4468"/>
+                </a:solidFill>
+              </a:defRPr>
+            </a:lvl1pPr>
+          </a:lstStyle>
+          <a:p>
+            <a:pPr lvl="0"/>
+            <a:r>
+              <a:rPr lang="en-GB"/>
+              <a:t>Click to edit Master text styles</a:t>
+            </a:r>
+          </a:p>
+        </p:txBody>
+      </p:sp>
+      <p:sp>
+        <p:nvSpPr>
+          <p:cNvPr id="17" name="Slide Number"/>
+          <p:cNvSpPr txBox="1">
+            <a:spLocks noGrp="1"/>
+          </p:cNvSpPr>
+          <p:nvPr>
+            <p:ph type="sldNum" sz="quarter" idx="2"/>
+          </p:nvPr>
+        </p:nvSpPr>
+        <p:spPr>
+          <a:xfrm>
+            <a:off x="11091544" y="6360984"/>
+            <a:ext cx="495649" cy="492440"/>
+          </a:xfrm>
+          <a:prstGeom prst="rect">
+            <a:avLst/>
+          </a:prstGeom>
+        </p:spPr>
+        <p:txBody>
+          <a:bodyPr/>
+          <a:lstStyle>
+            <a:lvl1pPr>
+              <a:defRPr sz="2000"/>
+            </a:lvl1pPr>
+          </a:lstStyle>
+          <a:p>
+            <a:fld id="{B6F15528-21DE-4FAA-801E-634DDDAF4B2B}" type="slidenum">
+              <a:rPr lang="en-US" smtClean="0"/>
+              <a:pPr/>
+              <a:t>‹#›</a:t>
+            </a:fld>
+            <a:endParaRPr lang="en-US"/>
+          </a:p>
+        </p:txBody>
+      </p:sp>
+    </p:spTree>
+    <p:extLst>
+      <p:ext uri="{BB962C8B-B14F-4D97-AF65-F5344CB8AC3E}">
+        <p14:creationId xmlns:p14="http://schemas.microsoft.com/office/powerpoint/2010/main" val="2924826443"/>
+      </p:ext>
+    </p:extLst>
+  </p:cSld>
+  <p:clrMapOvr>
+    <a:masterClrMapping/>
+  </p:clrMapOvr>
+  <p:transition spd="med"/>
+</p:sldLayout>
+</file>
+
+<file path=ppt/slideLayouts/slideLayout14.xml><?xml version="1.0" encoding="utf-8"?>
+<p:sldLayout xmlns:a="http://schemas.openxmlformats.org/drawingml/2006/main" xmlns:r="http://schemas.openxmlformats.org/officeDocument/2006/relationships" xmlns:p="http://schemas.openxmlformats.org/presentationml/2006/main" type="tx">
+  <p:cSld name="Title and Box">
+    <p:spTree>
+      <p:nvGrpSpPr>
+        <p:cNvPr id="1" name=""/>
+        <p:cNvGrpSpPr/>
+        <p:nvPr/>
+      </p:nvGrpSpPr>
+      <p:grpSpPr>
+        <a:xfrm>
+          <a:off x="0" y="0"/>
+          <a:ext cx="0" cy="0"/>
+          <a:chOff x="0" y="0"/>
+          <a:chExt cx="0" cy="0"/>
+        </a:xfrm>
+      </p:grpSpPr>
+      <p:sp>
+        <p:nvSpPr>
+          <p:cNvPr id="33" name="Slide Number"/>
+          <p:cNvSpPr txBox="1">
+            <a:spLocks noGrp="1"/>
+          </p:cNvSpPr>
+          <p:nvPr>
+            <p:ph type="sldNum" sz="quarter" idx="2"/>
+          </p:nvPr>
+        </p:nvSpPr>
+        <p:spPr>
+          <a:xfrm>
+            <a:off x="11691066" y="6493542"/>
+            <a:ext cx="434734" cy="430885"/>
+          </a:xfrm>
+          <a:prstGeom prst="rect">
+            <a:avLst/>
+          </a:prstGeom>
+        </p:spPr>
+        <p:txBody>
+          <a:bodyPr/>
+          <a:lstStyle/>
+          <a:p>
+            <a:fld id="{B6F15528-21DE-4FAA-801E-634DDDAF4B2B}" type="slidenum">
+              <a:rPr lang="en-US" smtClean="0"/>
+              <a:pPr/>
+              <a:t>‹#›</a:t>
+            </a:fld>
+            <a:endParaRPr lang="en-US"/>
+          </a:p>
+        </p:txBody>
+      </p:sp>
+      <p:sp>
+        <p:nvSpPr>
+          <p:cNvPr id="34" name="Title Text"/>
+          <p:cNvSpPr txBox="1">
+            <a:spLocks noGrp="1"/>
+          </p:cNvSpPr>
+          <p:nvPr>
+            <p:ph type="title"/>
+          </p:nvPr>
+        </p:nvSpPr>
+        <p:spPr>
+          <a:xfrm>
+            <a:off x="729736" y="395556"/>
+            <a:ext cx="10747254" cy="1143001"/>
+          </a:xfrm>
+          <a:prstGeom prst="rect">
+            <a:avLst/>
+          </a:prstGeom>
+        </p:spPr>
+        <p:txBody>
+          <a:bodyPr/>
+          <a:lstStyle/>
+          <a:p>
+            <a:r>
+              <a:rPr lang="en-GB"/>
+              <a:t>Click to edit Master title style</a:t>
+            </a:r>
+            <a:endParaRPr/>
+          </a:p>
+        </p:txBody>
+      </p:sp>
+    </p:spTree>
+    <p:extLst>
+      <p:ext uri="{BB962C8B-B14F-4D97-AF65-F5344CB8AC3E}">
+        <p14:creationId xmlns:p14="http://schemas.microsoft.com/office/powerpoint/2010/main" val="3961264373"/>
+      </p:ext>
+    </p:extLst>
+  </p:cSld>
+  <p:clrMapOvr>
+    <a:masterClrMapping/>
+  </p:clrMapOvr>
+  <p:transition spd="med"/>
+</p:sldLayout>
+</file>
+
+<file path=ppt/slideLayouts/slideLayout15.xml><?xml version="1.0" encoding="utf-8"?>
+<p:sldLayout xmlns:a="http://schemas.openxmlformats.org/drawingml/2006/main" xmlns:r="http://schemas.openxmlformats.org/officeDocument/2006/relationships" xmlns:p="http://schemas.openxmlformats.org/presentationml/2006/main" type="txAndChart">
+  <p:cSld name="Title, Text and Chart">
+    <p:spTree>
+      <p:nvGrpSpPr>
+        <p:cNvPr id="1" name=""/>
+        <p:cNvGrpSpPr/>
+        <p:nvPr/>
+      </p:nvGrpSpPr>
+      <p:grpSpPr>
+        <a:xfrm>
+          <a:off x="0" y="0"/>
+          <a:ext cx="0" cy="0"/>
+          <a:chOff x="0" y="0"/>
+          <a:chExt cx="0" cy="0"/>
+        </a:xfrm>
+      </p:grpSpPr>
+      <p:sp>
+        <p:nvSpPr>
+          <p:cNvPr id="2" name="Title 1"/>
+          <p:cNvSpPr>
+            <a:spLocks noGrp="1"/>
+          </p:cNvSpPr>
+          <p:nvPr>
+            <p:ph type="title"/>
+          </p:nvPr>
+        </p:nvSpPr>
+        <p:spPr>
+          <a:xfrm>
+            <a:off x="1320800" y="381000"/>
+            <a:ext cx="10363200" cy="1143000"/>
+          </a:xfrm>
+        </p:spPr>
+        <p:txBody>
+          <a:bodyPr/>
+          <a:lstStyle/>
+          <a:p>
+            <a:r>
+              <a:rPr lang="en-GB"/>
+              <a:t>Click to edit Master title style</a:t>
+            </a:r>
+            <a:endParaRPr lang="en-US"/>
+          </a:p>
+        </p:txBody>
+      </p:sp>
+      <p:sp>
+        <p:nvSpPr>
+          <p:cNvPr id="3" name="Text Placeholder 2"/>
+          <p:cNvSpPr>
+            <a:spLocks noGrp="1"/>
+          </p:cNvSpPr>
+          <p:nvPr>
+            <p:ph type="body" sz="half" idx="1"/>
+          </p:nvPr>
+        </p:nvSpPr>
+        <p:spPr>
+          <a:xfrm>
+            <a:off x="1625600" y="1828800"/>
+            <a:ext cx="4876800" cy="4267200"/>
+          </a:xfrm>
+        </p:spPr>
+        <p:txBody>
+          <a:bodyPr/>
+          <a:lstStyle/>
+          <a:p>
+            <a:pPr lvl="0"/>
+            <a:r>
+              <a:rPr lang="en-GB"/>
+              <a:t>Click to edit Master text styles</a:t>
+            </a:r>
+          </a:p>
+          <a:p>
+            <a:pPr lvl="1"/>
+            <a:r>
+              <a:rPr lang="en-GB"/>
+              <a:t>Second level</a:t>
+            </a:r>
+          </a:p>
+          <a:p>
+            <a:pPr lvl="2"/>
+            <a:r>
+              <a:rPr lang="en-GB"/>
+              <a:t>Third level</a:t>
+            </a:r>
+          </a:p>
+          <a:p>
+            <a:pPr lvl="3"/>
+            <a:r>
+              <a:rPr lang="en-GB"/>
+              <a:t>Fourth level</a:t>
+            </a:r>
+          </a:p>
+          <a:p>
+            <a:pPr lvl="4"/>
+            <a:r>
+              <a:rPr lang="en-GB"/>
+              <a:t>Fifth level</a:t>
+            </a:r>
+            <a:endParaRPr lang="en-US"/>
+          </a:p>
+        </p:txBody>
+      </p:sp>
+      <p:sp>
+        <p:nvSpPr>
+          <p:cNvPr id="4" name="Chart Placeholder 3"/>
+          <p:cNvSpPr>
+            <a:spLocks noGrp="1"/>
+          </p:cNvSpPr>
+          <p:nvPr>
+            <p:ph type="chart" sz="half" idx="2"/>
+          </p:nvPr>
+        </p:nvSpPr>
+        <p:spPr>
+          <a:xfrm>
+            <a:off x="6705600" y="1828800"/>
+            <a:ext cx="4876800" cy="4267200"/>
+          </a:xfrm>
+        </p:spPr>
+        <p:txBody>
+          <a:bodyPr/>
+          <a:lstStyle/>
+          <a:p>
+            <a:pPr lvl="0"/>
+            <a:r>
+              <a:rPr lang="en-GB" noProof="0"/>
+              <a:t>Click icon to add chart</a:t>
+            </a:r>
+            <a:endParaRPr lang="en-US" noProof="0"/>
+          </a:p>
+        </p:txBody>
+      </p:sp>
+      <p:sp>
+        <p:nvSpPr>
+          <p:cNvPr id="5" name="Rectangle 1028"/>
+          <p:cNvSpPr>
+            <a:spLocks noGrp="1" noChangeArrowheads="1"/>
+          </p:cNvSpPr>
+          <p:nvPr>
+            <p:ph type="ftr" sz="quarter" idx="10"/>
+          </p:nvPr>
+        </p:nvSpPr>
+        <p:spPr>
+          <a:ln/>
+        </p:spPr>
+        <p:txBody>
+          <a:bodyPr/>
+          <a:lstStyle>
+            <a:lvl1pPr>
+              <a:defRPr/>
+            </a:lvl1pPr>
+          </a:lstStyle>
+          <a:p>
+            <a:endParaRPr lang="en-US"/>
+          </a:p>
+        </p:txBody>
+      </p:sp>
+    </p:spTree>
+    <p:extLst>
+      <p:ext uri="{BB962C8B-B14F-4D97-AF65-F5344CB8AC3E}">
+        <p14:creationId xmlns:p14="http://schemas.microsoft.com/office/powerpoint/2010/main" val="266102139"/>
+      </p:ext>
+    </p:extLst>
   </p:cSld>
   <p:clrMapOvr>
     <a:masterClrMapping/>
@@ -2047,9 +2503,10 @@
           </a:lstStyle>
           <a:p>
             <a:r>
-              <a:rPr lang="en-US" dirty="0"/>
+              <a:rPr lang="en-GB"/>
               <a:t>Click to edit Master title style</a:t>
             </a:r>
+            <a:endParaRPr lang="en-US" dirty="0"/>
           </a:p>
         </p:txBody>
       </p:sp>
@@ -2070,37 +2527,38 @@
           <a:p>
             <a:pPr lvl="0"/>
             <a:r>
-              <a:rPr lang="en-US"/>
+              <a:rPr lang="en-GB"/>
               <a:t>Click to edit Master text styles</a:t>
             </a:r>
           </a:p>
           <a:p>
             <a:pPr lvl="1"/>
             <a:r>
-              <a:rPr lang="en-US"/>
+              <a:rPr lang="en-GB"/>
               <a:t>Second level</a:t>
             </a:r>
           </a:p>
           <a:p>
             <a:pPr lvl="2"/>
             <a:r>
-              <a:rPr lang="en-US"/>
+              <a:rPr lang="en-GB"/>
               <a:t>Third level</a:t>
             </a:r>
           </a:p>
           <a:p>
             <a:pPr lvl="3"/>
             <a:r>
-              <a:rPr lang="en-US"/>
+              <a:rPr lang="en-GB"/>
               <a:t>Fourth level</a:t>
             </a:r>
           </a:p>
           <a:p>
             <a:pPr lvl="4"/>
             <a:r>
-              <a:rPr lang="en-US"/>
+              <a:rPr lang="en-GB"/>
               <a:t>Fifth level</a:t>
             </a:r>
+            <a:endParaRPr lang="en-US"/>
           </a:p>
         </p:txBody>
       </p:sp>
@@ -2122,7 +2580,7 @@
             <a:fld id="{1D8BD707-D9CF-40AE-B4C6-C98DA3205C09}" type="datetimeFigureOut">
               <a:rPr lang="en-US" smtClean="0"/>
               <a:pPr/>
-              <a:t>10/9/2025</a:t>
+              <a:t>10/30/25</a:t>
             </a:fld>
             <a:endParaRPr lang="en-US"/>
           </a:p>
@@ -2175,7 +2633,7 @@
         <p:nvCxnSpPr>
           <p:cNvPr id="7" name="Straight Connector 6"/>
           <p:cNvCxnSpPr/>
-          <p:nvPr userDrawn="1"/>
+          <p:nvPr/>
         </p:nvCxnSpPr>
         <p:spPr>
           <a:xfrm>
@@ -2209,7 +2667,232 @@
           </a:fontRef>
         </p:style>
       </p:cxnSp>
+      <p:cxnSp>
+        <p:nvCxnSpPr>
+          <p:cNvPr id="8" name="Straight Connector 7">
+            <a:extLst>
+              <a:ext uri="{FF2B5EF4-FFF2-40B4-BE49-F238E27FC236}">
+                <a16:creationId xmlns:a16="http://schemas.microsoft.com/office/drawing/2014/main" id="{A54FA624-7CFC-3CFB-8384-E3FA99B20E94}"/>
+              </a:ext>
+            </a:extLst>
+          </p:cNvPr>
+          <p:cNvCxnSpPr/>
+          <p:nvPr/>
+        </p:nvCxnSpPr>
+        <p:spPr>
+          <a:xfrm>
+            <a:off x="609600" y="1447800"/>
+            <a:ext cx="11074400" cy="0"/>
+          </a:xfrm>
+          <a:prstGeom prst="line">
+            <a:avLst/>
+          </a:prstGeom>
+          <a:ln w="12700">
+            <a:solidFill>
+              <a:schemeClr val="tx1">
+                <a:lumMod val="50000"/>
+                <a:lumOff val="50000"/>
+              </a:schemeClr>
+            </a:solidFill>
+          </a:ln>
+        </p:spPr>
+        <p:style>
+          <a:lnRef idx="1">
+            <a:schemeClr val="accent1"/>
+          </a:lnRef>
+          <a:fillRef idx="0">
+            <a:schemeClr val="accent1"/>
+          </a:fillRef>
+          <a:effectRef idx="0">
+            <a:schemeClr val="accent1"/>
+          </a:effectRef>
+          <a:fontRef idx="minor">
+            <a:schemeClr val="tx1"/>
+          </a:fontRef>
+        </p:style>
+      </p:cxnSp>
+      <p:cxnSp>
+        <p:nvCxnSpPr>
+          <p:cNvPr id="9" name="Straight Connector 8">
+            <a:extLst>
+              <a:ext uri="{FF2B5EF4-FFF2-40B4-BE49-F238E27FC236}">
+                <a16:creationId xmlns:a16="http://schemas.microsoft.com/office/drawing/2014/main" id="{9C51F014-A304-3672-EB37-723E4843A104}"/>
+              </a:ext>
+            </a:extLst>
+          </p:cNvPr>
+          <p:cNvCxnSpPr/>
+          <p:nvPr/>
+        </p:nvCxnSpPr>
+        <p:spPr>
+          <a:xfrm>
+            <a:off x="609600" y="1447800"/>
+            <a:ext cx="11074400" cy="0"/>
+          </a:xfrm>
+          <a:prstGeom prst="line">
+            <a:avLst/>
+          </a:prstGeom>
+          <a:ln w="12700">
+            <a:solidFill>
+              <a:schemeClr val="tx1">
+                <a:lumMod val="50000"/>
+                <a:lumOff val="50000"/>
+              </a:schemeClr>
+            </a:solidFill>
+          </a:ln>
+        </p:spPr>
+        <p:style>
+          <a:lnRef idx="1">
+            <a:schemeClr val="accent1"/>
+          </a:lnRef>
+          <a:fillRef idx="0">
+            <a:schemeClr val="accent1"/>
+          </a:fillRef>
+          <a:effectRef idx="0">
+            <a:schemeClr val="accent1"/>
+          </a:effectRef>
+          <a:fontRef idx="minor">
+            <a:schemeClr val="tx1"/>
+          </a:fontRef>
+        </p:style>
+      </p:cxnSp>
+      <p:cxnSp>
+        <p:nvCxnSpPr>
+          <p:cNvPr id="10" name="Straight Connector 9">
+            <a:extLst>
+              <a:ext uri="{FF2B5EF4-FFF2-40B4-BE49-F238E27FC236}">
+                <a16:creationId xmlns:a16="http://schemas.microsoft.com/office/drawing/2014/main" id="{1577319E-D913-0186-1403-29DAAB909981}"/>
+              </a:ext>
+            </a:extLst>
+          </p:cNvPr>
+          <p:cNvCxnSpPr/>
+          <p:nvPr/>
+        </p:nvCxnSpPr>
+        <p:spPr>
+          <a:xfrm>
+            <a:off x="609600" y="1447800"/>
+            <a:ext cx="11074400" cy="0"/>
+          </a:xfrm>
+          <a:prstGeom prst="line">
+            <a:avLst/>
+          </a:prstGeom>
+          <a:ln w="12700">
+            <a:solidFill>
+              <a:schemeClr val="tx1">
+                <a:lumMod val="50000"/>
+                <a:lumOff val="50000"/>
+              </a:schemeClr>
+            </a:solidFill>
+          </a:ln>
+        </p:spPr>
+        <p:style>
+          <a:lnRef idx="1">
+            <a:schemeClr val="accent1"/>
+          </a:lnRef>
+          <a:fillRef idx="0">
+            <a:schemeClr val="accent1"/>
+          </a:fillRef>
+          <a:effectRef idx="0">
+            <a:schemeClr val="accent1"/>
+          </a:effectRef>
+          <a:fontRef idx="minor">
+            <a:schemeClr val="tx1"/>
+          </a:fontRef>
+        </p:style>
+      </p:cxnSp>
+      <p:cxnSp>
+        <p:nvCxnSpPr>
+          <p:cNvPr id="11" name="Straight Connector 10">
+            <a:extLst>
+              <a:ext uri="{FF2B5EF4-FFF2-40B4-BE49-F238E27FC236}">
+                <a16:creationId xmlns:a16="http://schemas.microsoft.com/office/drawing/2014/main" id="{BE1E79F1-A6BC-9BFA-D91F-EDE58012F586}"/>
+              </a:ext>
+            </a:extLst>
+          </p:cNvPr>
+          <p:cNvCxnSpPr/>
+          <p:nvPr/>
+        </p:nvCxnSpPr>
+        <p:spPr>
+          <a:xfrm>
+            <a:off x="609600" y="1447800"/>
+            <a:ext cx="11074400" cy="0"/>
+          </a:xfrm>
+          <a:prstGeom prst="line">
+            <a:avLst/>
+          </a:prstGeom>
+          <a:ln w="12700">
+            <a:solidFill>
+              <a:schemeClr val="tx1">
+                <a:lumMod val="50000"/>
+                <a:lumOff val="50000"/>
+              </a:schemeClr>
+            </a:solidFill>
+          </a:ln>
+        </p:spPr>
+        <p:style>
+          <a:lnRef idx="1">
+            <a:schemeClr val="accent1"/>
+          </a:lnRef>
+          <a:fillRef idx="0">
+            <a:schemeClr val="accent1"/>
+          </a:fillRef>
+          <a:effectRef idx="0">
+            <a:schemeClr val="accent1"/>
+          </a:effectRef>
+          <a:fontRef idx="minor">
+            <a:schemeClr val="tx1"/>
+          </a:fontRef>
+        </p:style>
+      </p:cxnSp>
+      <p:cxnSp>
+        <p:nvCxnSpPr>
+          <p:cNvPr id="12" name="Straight Connector 11">
+            <a:extLst>
+              <a:ext uri="{FF2B5EF4-FFF2-40B4-BE49-F238E27FC236}">
+                <a16:creationId xmlns:a16="http://schemas.microsoft.com/office/drawing/2014/main" id="{BEC2A726-E7C3-B5E1-B9B6-664DAB4B012C}"/>
+              </a:ext>
+            </a:extLst>
+          </p:cNvPr>
+          <p:cNvCxnSpPr/>
+          <p:nvPr userDrawn="1"/>
+        </p:nvCxnSpPr>
+        <p:spPr>
+          <a:xfrm>
+            <a:off x="609600" y="1447800"/>
+            <a:ext cx="11074400" cy="0"/>
+          </a:xfrm>
+          <a:prstGeom prst="line">
+            <a:avLst/>
+          </a:prstGeom>
+          <a:ln w="12700">
+            <a:solidFill>
+              <a:schemeClr val="tx1">
+                <a:lumMod val="50000"/>
+                <a:lumOff val="50000"/>
+              </a:schemeClr>
+            </a:solidFill>
+          </a:ln>
+        </p:spPr>
+        <p:style>
+          <a:lnRef idx="1">
+            <a:schemeClr val="accent1"/>
+          </a:lnRef>
+          <a:fillRef idx="0">
+            <a:schemeClr val="accent1"/>
+          </a:fillRef>
+          <a:effectRef idx="0">
+            <a:schemeClr val="accent1"/>
+          </a:effectRef>
+          <a:fontRef idx="minor">
+            <a:schemeClr val="tx1"/>
+          </a:fontRef>
+        </p:style>
+      </p:cxnSp>
     </p:spTree>
+    <p:extLst>
+      <p:ext uri="{BB962C8B-B14F-4D97-AF65-F5344CB8AC3E}">
+        <p14:creationId xmlns:p14="http://schemas.microsoft.com/office/powerpoint/2010/main" val="1484019584"/>
+      </p:ext>
+    </p:extLst>
   </p:cSld>
   <p:clrMapOvr>
     <a:masterClrMapping/>
@@ -2259,9 +2942,10 @@
           </a:lstStyle>
           <a:p>
             <a:r>
-              <a:rPr lang="en-US"/>
+              <a:rPr lang="en-GB"/>
               <a:t>Click to edit Master title style</a:t>
             </a:r>
+            <a:endParaRPr lang="en-US"/>
           </a:p>
         </p:txBody>
       </p:sp>
@@ -2378,7 +3062,7 @@
           <a:p>
             <a:pPr lvl="0"/>
             <a:r>
-              <a:rPr lang="en-US"/>
+              <a:rPr lang="en-GB"/>
               <a:t>Click to edit Master text styles</a:t>
             </a:r>
           </a:p>
@@ -2402,7 +3086,7 @@
             <a:fld id="{1D8BD707-D9CF-40AE-B4C6-C98DA3205C09}" type="datetimeFigureOut">
               <a:rPr lang="en-US" smtClean="0"/>
               <a:pPr/>
-              <a:t>10/9/2025</a:t>
+              <a:t>10/30/25</a:t>
             </a:fld>
             <a:endParaRPr lang="en-US"/>
           </a:p>
@@ -2452,6 +3136,11 @@
         </p:txBody>
       </p:sp>
     </p:spTree>
+    <p:extLst>
+      <p:ext uri="{BB962C8B-B14F-4D97-AF65-F5344CB8AC3E}">
+        <p14:creationId xmlns:p14="http://schemas.microsoft.com/office/powerpoint/2010/main" val="740973537"/>
+      </p:ext>
+    </p:extLst>
   </p:cSld>
   <p:clrMapOvr>
     <a:masterClrMapping/>
@@ -2503,9 +3192,10 @@
           </a:lstStyle>
           <a:p>
             <a:r>
-              <a:rPr lang="en-US" dirty="0"/>
+              <a:rPr lang="en-GB"/>
               <a:t>Click to edit Master title style</a:t>
             </a:r>
+            <a:endParaRPr lang="en-US" dirty="0"/>
           </a:p>
         </p:txBody>
       </p:sp>
@@ -2559,37 +3249,38 @@
           <a:p>
             <a:pPr lvl="0"/>
             <a:r>
-              <a:rPr lang="en-US"/>
+              <a:rPr lang="en-GB"/>
               <a:t>Click to edit Master text styles</a:t>
             </a:r>
           </a:p>
           <a:p>
             <a:pPr lvl="1"/>
             <a:r>
-              <a:rPr lang="en-US"/>
+              <a:rPr lang="en-GB"/>
               <a:t>Second level</a:t>
             </a:r>
           </a:p>
           <a:p>
             <a:pPr lvl="2"/>
             <a:r>
-              <a:rPr lang="en-US"/>
+              <a:rPr lang="en-GB"/>
               <a:t>Third level</a:t>
             </a:r>
           </a:p>
           <a:p>
             <a:pPr lvl="3"/>
             <a:r>
-              <a:rPr lang="en-US"/>
+              <a:rPr lang="en-GB"/>
               <a:t>Fourth level</a:t>
             </a:r>
           </a:p>
           <a:p>
             <a:pPr lvl="4"/>
             <a:r>
-              <a:rPr lang="en-US"/>
+              <a:rPr lang="en-GB"/>
               <a:t>Fifth level</a:t>
             </a:r>
+            <a:endParaRPr lang="en-US"/>
           </a:p>
         </p:txBody>
       </p:sp>
@@ -2643,37 +3334,38 @@
           <a:p>
             <a:pPr lvl="0"/>
             <a:r>
-              <a:rPr lang="en-US"/>
+              <a:rPr lang="en-GB"/>
               <a:t>Click to edit Master text styles</a:t>
             </a:r>
           </a:p>
           <a:p>
             <a:pPr lvl="1"/>
             <a:r>
-              <a:rPr lang="en-US"/>
+              <a:rPr lang="en-GB"/>
               <a:t>Second level</a:t>
             </a:r>
           </a:p>
           <a:p>
             <a:pPr lvl="2"/>
             <a:r>
-              <a:rPr lang="en-US"/>
+              <a:rPr lang="en-GB"/>
               <a:t>Third level</a:t>
             </a:r>
           </a:p>
           <a:p>
             <a:pPr lvl="3"/>
             <a:r>
-              <a:rPr lang="en-US"/>
+              <a:rPr lang="en-GB"/>
               <a:t>Fourth level</a:t>
             </a:r>
           </a:p>
           <a:p>
             <a:pPr lvl="4"/>
             <a:r>
-              <a:rPr lang="en-US"/>
+              <a:rPr lang="en-GB"/>
               <a:t>Fifth level</a:t>
             </a:r>
+            <a:endParaRPr lang="en-US"/>
           </a:p>
         </p:txBody>
       </p:sp>
@@ -2695,7 +3387,7 @@
             <a:fld id="{1D8BD707-D9CF-40AE-B4C6-C98DA3205C09}" type="datetimeFigureOut">
               <a:rPr lang="en-US" smtClean="0"/>
               <a:pPr/>
-              <a:t>10/9/2025</a:t>
+              <a:t>10/30/25</a:t>
             </a:fld>
             <a:endParaRPr lang="en-US"/>
           </a:p>
@@ -2748,7 +3440,7 @@
         <p:nvCxnSpPr>
           <p:cNvPr id="8" name="Straight Connector 7"/>
           <p:cNvCxnSpPr/>
-          <p:nvPr userDrawn="1"/>
+          <p:nvPr/>
         </p:nvCxnSpPr>
         <p:spPr>
           <a:xfrm>
@@ -2779,7 +3471,217 @@
           </a:fontRef>
         </p:style>
       </p:cxnSp>
+      <p:cxnSp>
+        <p:nvCxnSpPr>
+          <p:cNvPr id="9" name="Straight Connector 8">
+            <a:extLst>
+              <a:ext uri="{FF2B5EF4-FFF2-40B4-BE49-F238E27FC236}">
+                <a16:creationId xmlns:a16="http://schemas.microsoft.com/office/drawing/2014/main" id="{0F42A16B-6893-A143-E832-A99D7B6427B3}"/>
+              </a:ext>
+            </a:extLst>
+          </p:cNvPr>
+          <p:cNvCxnSpPr/>
+          <p:nvPr/>
+        </p:nvCxnSpPr>
+        <p:spPr>
+          <a:xfrm>
+            <a:off x="609600" y="1447800"/>
+            <a:ext cx="11074400" cy="0"/>
+          </a:xfrm>
+          <a:prstGeom prst="line">
+            <a:avLst/>
+          </a:prstGeom>
+          <a:ln w="12700">
+            <a:solidFill>
+              <a:schemeClr val="tx1"/>
+            </a:solidFill>
+          </a:ln>
+        </p:spPr>
+        <p:style>
+          <a:lnRef idx="1">
+            <a:schemeClr val="accent1"/>
+          </a:lnRef>
+          <a:fillRef idx="0">
+            <a:schemeClr val="accent1"/>
+          </a:fillRef>
+          <a:effectRef idx="0">
+            <a:schemeClr val="accent1"/>
+          </a:effectRef>
+          <a:fontRef idx="minor">
+            <a:schemeClr val="tx1"/>
+          </a:fontRef>
+        </p:style>
+      </p:cxnSp>
+      <p:cxnSp>
+        <p:nvCxnSpPr>
+          <p:cNvPr id="10" name="Straight Connector 9">
+            <a:extLst>
+              <a:ext uri="{FF2B5EF4-FFF2-40B4-BE49-F238E27FC236}">
+                <a16:creationId xmlns:a16="http://schemas.microsoft.com/office/drawing/2014/main" id="{9B64861E-C2E3-2C0F-0C43-CF6F042CC211}"/>
+              </a:ext>
+            </a:extLst>
+          </p:cNvPr>
+          <p:cNvCxnSpPr/>
+          <p:nvPr/>
+        </p:nvCxnSpPr>
+        <p:spPr>
+          <a:xfrm>
+            <a:off x="609600" y="1447800"/>
+            <a:ext cx="11074400" cy="0"/>
+          </a:xfrm>
+          <a:prstGeom prst="line">
+            <a:avLst/>
+          </a:prstGeom>
+          <a:ln w="12700">
+            <a:solidFill>
+              <a:schemeClr val="tx1"/>
+            </a:solidFill>
+          </a:ln>
+        </p:spPr>
+        <p:style>
+          <a:lnRef idx="1">
+            <a:schemeClr val="accent1"/>
+          </a:lnRef>
+          <a:fillRef idx="0">
+            <a:schemeClr val="accent1"/>
+          </a:fillRef>
+          <a:effectRef idx="0">
+            <a:schemeClr val="accent1"/>
+          </a:effectRef>
+          <a:fontRef idx="minor">
+            <a:schemeClr val="tx1"/>
+          </a:fontRef>
+        </p:style>
+      </p:cxnSp>
+      <p:cxnSp>
+        <p:nvCxnSpPr>
+          <p:cNvPr id="11" name="Straight Connector 10">
+            <a:extLst>
+              <a:ext uri="{FF2B5EF4-FFF2-40B4-BE49-F238E27FC236}">
+                <a16:creationId xmlns:a16="http://schemas.microsoft.com/office/drawing/2014/main" id="{3DE2AD0E-60F6-798F-5218-679762744249}"/>
+              </a:ext>
+            </a:extLst>
+          </p:cNvPr>
+          <p:cNvCxnSpPr/>
+          <p:nvPr/>
+        </p:nvCxnSpPr>
+        <p:spPr>
+          <a:xfrm>
+            <a:off x="609600" y="1447800"/>
+            <a:ext cx="11074400" cy="0"/>
+          </a:xfrm>
+          <a:prstGeom prst="line">
+            <a:avLst/>
+          </a:prstGeom>
+          <a:ln w="12700">
+            <a:solidFill>
+              <a:schemeClr val="tx1"/>
+            </a:solidFill>
+          </a:ln>
+        </p:spPr>
+        <p:style>
+          <a:lnRef idx="1">
+            <a:schemeClr val="accent1"/>
+          </a:lnRef>
+          <a:fillRef idx="0">
+            <a:schemeClr val="accent1"/>
+          </a:fillRef>
+          <a:effectRef idx="0">
+            <a:schemeClr val="accent1"/>
+          </a:effectRef>
+          <a:fontRef idx="minor">
+            <a:schemeClr val="tx1"/>
+          </a:fontRef>
+        </p:style>
+      </p:cxnSp>
+      <p:cxnSp>
+        <p:nvCxnSpPr>
+          <p:cNvPr id="12" name="Straight Connector 11">
+            <a:extLst>
+              <a:ext uri="{FF2B5EF4-FFF2-40B4-BE49-F238E27FC236}">
+                <a16:creationId xmlns:a16="http://schemas.microsoft.com/office/drawing/2014/main" id="{C46373DF-09B0-AAD0-9A0F-77BAB32A9FC2}"/>
+              </a:ext>
+            </a:extLst>
+          </p:cNvPr>
+          <p:cNvCxnSpPr/>
+          <p:nvPr/>
+        </p:nvCxnSpPr>
+        <p:spPr>
+          <a:xfrm>
+            <a:off x="609600" y="1447800"/>
+            <a:ext cx="11074400" cy="0"/>
+          </a:xfrm>
+          <a:prstGeom prst="line">
+            <a:avLst/>
+          </a:prstGeom>
+          <a:ln w="12700">
+            <a:solidFill>
+              <a:schemeClr val="tx1"/>
+            </a:solidFill>
+          </a:ln>
+        </p:spPr>
+        <p:style>
+          <a:lnRef idx="1">
+            <a:schemeClr val="accent1"/>
+          </a:lnRef>
+          <a:fillRef idx="0">
+            <a:schemeClr val="accent1"/>
+          </a:fillRef>
+          <a:effectRef idx="0">
+            <a:schemeClr val="accent1"/>
+          </a:effectRef>
+          <a:fontRef idx="minor">
+            <a:schemeClr val="tx1"/>
+          </a:fontRef>
+        </p:style>
+      </p:cxnSp>
+      <p:cxnSp>
+        <p:nvCxnSpPr>
+          <p:cNvPr id="13" name="Straight Connector 12">
+            <a:extLst>
+              <a:ext uri="{FF2B5EF4-FFF2-40B4-BE49-F238E27FC236}">
+                <a16:creationId xmlns:a16="http://schemas.microsoft.com/office/drawing/2014/main" id="{5380B96D-A6CD-476E-2216-554A3DB839E7}"/>
+              </a:ext>
+            </a:extLst>
+          </p:cNvPr>
+          <p:cNvCxnSpPr/>
+          <p:nvPr userDrawn="1"/>
+        </p:nvCxnSpPr>
+        <p:spPr>
+          <a:xfrm>
+            <a:off x="609600" y="1447800"/>
+            <a:ext cx="11074400" cy="0"/>
+          </a:xfrm>
+          <a:prstGeom prst="line">
+            <a:avLst/>
+          </a:prstGeom>
+          <a:ln w="12700">
+            <a:solidFill>
+              <a:schemeClr val="tx1"/>
+            </a:solidFill>
+          </a:ln>
+        </p:spPr>
+        <p:style>
+          <a:lnRef idx="1">
+            <a:schemeClr val="accent1"/>
+          </a:lnRef>
+          <a:fillRef idx="0">
+            <a:schemeClr val="accent1"/>
+          </a:fillRef>
+          <a:effectRef idx="0">
+            <a:schemeClr val="accent1"/>
+          </a:effectRef>
+          <a:fontRef idx="minor">
+            <a:schemeClr val="tx1"/>
+          </a:fontRef>
+        </p:style>
+      </p:cxnSp>
     </p:spTree>
+    <p:extLst>
+      <p:ext uri="{BB962C8B-B14F-4D97-AF65-F5344CB8AC3E}">
+        <p14:creationId xmlns:p14="http://schemas.microsoft.com/office/powerpoint/2010/main" val="2854813019"/>
+      </p:ext>
+    </p:extLst>
   </p:cSld>
   <p:clrMapOvr>
     <a:masterClrMapping/>
@@ -2831,9 +3733,10 @@
           </a:lstStyle>
           <a:p>
             <a:r>
-              <a:rPr lang="en-US" dirty="0"/>
+              <a:rPr lang="en-GB"/>
               <a:t>Click to edit Master title style</a:t>
             </a:r>
+            <a:endParaRPr lang="en-US" dirty="0"/>
           </a:p>
         </p:txBody>
       </p:sp>
@@ -2896,7 +3799,7 @@
           <a:p>
             <a:pPr lvl="0"/>
             <a:r>
-              <a:rPr lang="en-US"/>
+              <a:rPr lang="en-GB"/>
               <a:t>Click to edit Master text styles</a:t>
             </a:r>
           </a:p>
@@ -2952,37 +3855,38 @@
           <a:p>
             <a:pPr lvl="0"/>
             <a:r>
-              <a:rPr lang="en-US"/>
+              <a:rPr lang="en-GB"/>
               <a:t>Click to edit Master text styles</a:t>
             </a:r>
           </a:p>
           <a:p>
             <a:pPr lvl="1"/>
             <a:r>
-              <a:rPr lang="en-US"/>
+              <a:rPr lang="en-GB"/>
               <a:t>Second level</a:t>
             </a:r>
           </a:p>
           <a:p>
             <a:pPr lvl="2"/>
             <a:r>
-              <a:rPr lang="en-US"/>
+              <a:rPr lang="en-GB"/>
               <a:t>Third level</a:t>
             </a:r>
           </a:p>
           <a:p>
             <a:pPr lvl="3"/>
             <a:r>
-              <a:rPr lang="en-US"/>
+              <a:rPr lang="en-GB"/>
               <a:t>Fourth level</a:t>
             </a:r>
           </a:p>
           <a:p>
             <a:pPr lvl="4"/>
             <a:r>
-              <a:rPr lang="en-US"/>
+              <a:rPr lang="en-GB"/>
               <a:t>Fifth level</a:t>
             </a:r>
+            <a:endParaRPr lang="en-US"/>
           </a:p>
         </p:txBody>
       </p:sp>
@@ -3045,7 +3949,7 @@
           <a:p>
             <a:pPr lvl="0"/>
             <a:r>
-              <a:rPr lang="en-US"/>
+              <a:rPr lang="en-GB"/>
               <a:t>Click to edit Master text styles</a:t>
             </a:r>
           </a:p>
@@ -3101,37 +4005,38 @@
           <a:p>
             <a:pPr lvl="0"/>
             <a:r>
-              <a:rPr lang="en-US"/>
+              <a:rPr lang="en-GB"/>
               <a:t>Click to edit Master text styles</a:t>
             </a:r>
           </a:p>
           <a:p>
             <a:pPr lvl="1"/>
             <a:r>
-              <a:rPr lang="en-US"/>
+              <a:rPr lang="en-GB"/>
               <a:t>Second level</a:t>
             </a:r>
           </a:p>
           <a:p>
             <a:pPr lvl="2"/>
             <a:r>
-              <a:rPr lang="en-US"/>
+              <a:rPr lang="en-GB"/>
               <a:t>Third level</a:t>
             </a:r>
           </a:p>
           <a:p>
             <a:pPr lvl="3"/>
             <a:r>
-              <a:rPr lang="en-US"/>
+              <a:rPr lang="en-GB"/>
               <a:t>Fourth level</a:t>
             </a:r>
           </a:p>
           <a:p>
             <a:pPr lvl="4"/>
             <a:r>
-              <a:rPr lang="en-US"/>
+              <a:rPr lang="en-GB"/>
               <a:t>Fifth level</a:t>
             </a:r>
+            <a:endParaRPr lang="en-US"/>
           </a:p>
         </p:txBody>
       </p:sp>
@@ -3153,7 +4058,7 @@
             <a:fld id="{1D8BD707-D9CF-40AE-B4C6-C98DA3205C09}" type="datetimeFigureOut">
               <a:rPr lang="en-US" smtClean="0"/>
               <a:pPr/>
-              <a:t>10/9/2025</a:t>
+              <a:t>10/30/25</a:t>
             </a:fld>
             <a:endParaRPr lang="en-US"/>
           </a:p>
@@ -3206,7 +4111,7 @@
         <p:nvCxnSpPr>
           <p:cNvPr id="10" name="Straight Connector 9"/>
           <p:cNvCxnSpPr/>
-          <p:nvPr userDrawn="1"/>
+          <p:nvPr/>
         </p:nvCxnSpPr>
         <p:spPr>
           <a:xfrm>
@@ -3237,7 +4142,176 @@
           </a:fontRef>
         </p:style>
       </p:cxnSp>
+      <p:cxnSp>
+        <p:nvCxnSpPr>
+          <p:cNvPr id="11" name="Straight Connector 10">
+            <a:extLst>
+              <a:ext uri="{FF2B5EF4-FFF2-40B4-BE49-F238E27FC236}">
+                <a16:creationId xmlns:a16="http://schemas.microsoft.com/office/drawing/2014/main" id="{F3436290-11E2-F20B-966B-F18296CC48D7}"/>
+              </a:ext>
+            </a:extLst>
+          </p:cNvPr>
+          <p:cNvCxnSpPr/>
+          <p:nvPr/>
+        </p:nvCxnSpPr>
+        <p:spPr>
+          <a:xfrm>
+            <a:off x="609600" y="1447800"/>
+            <a:ext cx="11074400" cy="0"/>
+          </a:xfrm>
+          <a:prstGeom prst="line">
+            <a:avLst/>
+          </a:prstGeom>
+          <a:ln w="12700">
+            <a:solidFill>
+              <a:schemeClr val="tx1"/>
+            </a:solidFill>
+          </a:ln>
+        </p:spPr>
+        <p:style>
+          <a:lnRef idx="1">
+            <a:schemeClr val="accent1"/>
+          </a:lnRef>
+          <a:fillRef idx="0">
+            <a:schemeClr val="accent1"/>
+          </a:fillRef>
+          <a:effectRef idx="0">
+            <a:schemeClr val="accent1"/>
+          </a:effectRef>
+          <a:fontRef idx="minor">
+            <a:schemeClr val="tx1"/>
+          </a:fontRef>
+        </p:style>
+      </p:cxnSp>
+      <p:cxnSp>
+        <p:nvCxnSpPr>
+          <p:cNvPr id="12" name="Straight Connector 11">
+            <a:extLst>
+              <a:ext uri="{FF2B5EF4-FFF2-40B4-BE49-F238E27FC236}">
+                <a16:creationId xmlns:a16="http://schemas.microsoft.com/office/drawing/2014/main" id="{7669D825-370C-D932-7B44-4C1EE0EB0E21}"/>
+              </a:ext>
+            </a:extLst>
+          </p:cNvPr>
+          <p:cNvCxnSpPr/>
+          <p:nvPr/>
+        </p:nvCxnSpPr>
+        <p:spPr>
+          <a:xfrm>
+            <a:off x="609600" y="1447800"/>
+            <a:ext cx="11074400" cy="0"/>
+          </a:xfrm>
+          <a:prstGeom prst="line">
+            <a:avLst/>
+          </a:prstGeom>
+          <a:ln w="12700">
+            <a:solidFill>
+              <a:schemeClr val="tx1"/>
+            </a:solidFill>
+          </a:ln>
+        </p:spPr>
+        <p:style>
+          <a:lnRef idx="1">
+            <a:schemeClr val="accent1"/>
+          </a:lnRef>
+          <a:fillRef idx="0">
+            <a:schemeClr val="accent1"/>
+          </a:fillRef>
+          <a:effectRef idx="0">
+            <a:schemeClr val="accent1"/>
+          </a:effectRef>
+          <a:fontRef idx="minor">
+            <a:schemeClr val="tx1"/>
+          </a:fontRef>
+        </p:style>
+      </p:cxnSp>
+      <p:cxnSp>
+        <p:nvCxnSpPr>
+          <p:cNvPr id="13" name="Straight Connector 12">
+            <a:extLst>
+              <a:ext uri="{FF2B5EF4-FFF2-40B4-BE49-F238E27FC236}">
+                <a16:creationId xmlns:a16="http://schemas.microsoft.com/office/drawing/2014/main" id="{DB1F2B53-681A-1F9B-D38D-923C8065AAE2}"/>
+              </a:ext>
+            </a:extLst>
+          </p:cNvPr>
+          <p:cNvCxnSpPr/>
+          <p:nvPr/>
+        </p:nvCxnSpPr>
+        <p:spPr>
+          <a:xfrm>
+            <a:off x="609600" y="1447800"/>
+            <a:ext cx="11074400" cy="0"/>
+          </a:xfrm>
+          <a:prstGeom prst="line">
+            <a:avLst/>
+          </a:prstGeom>
+          <a:ln w="12700">
+            <a:solidFill>
+              <a:schemeClr val="tx1"/>
+            </a:solidFill>
+          </a:ln>
+        </p:spPr>
+        <p:style>
+          <a:lnRef idx="1">
+            <a:schemeClr val="accent1"/>
+          </a:lnRef>
+          <a:fillRef idx="0">
+            <a:schemeClr val="accent1"/>
+          </a:fillRef>
+          <a:effectRef idx="0">
+            <a:schemeClr val="accent1"/>
+          </a:effectRef>
+          <a:fontRef idx="minor">
+            <a:schemeClr val="tx1"/>
+          </a:fontRef>
+        </p:style>
+      </p:cxnSp>
+      <p:cxnSp>
+        <p:nvCxnSpPr>
+          <p:cNvPr id="14" name="Straight Connector 13">
+            <a:extLst>
+              <a:ext uri="{FF2B5EF4-FFF2-40B4-BE49-F238E27FC236}">
+                <a16:creationId xmlns:a16="http://schemas.microsoft.com/office/drawing/2014/main" id="{05A14DE6-4AEB-EA6F-982E-8A56488DAFEE}"/>
+              </a:ext>
+            </a:extLst>
+          </p:cNvPr>
+          <p:cNvCxnSpPr/>
+          <p:nvPr userDrawn="1"/>
+        </p:nvCxnSpPr>
+        <p:spPr>
+          <a:xfrm>
+            <a:off x="609600" y="1447800"/>
+            <a:ext cx="11074400" cy="0"/>
+          </a:xfrm>
+          <a:prstGeom prst="line">
+            <a:avLst/>
+          </a:prstGeom>
+          <a:ln w="12700">
+            <a:solidFill>
+              <a:schemeClr val="tx1"/>
+            </a:solidFill>
+          </a:ln>
+        </p:spPr>
+        <p:style>
+          <a:lnRef idx="1">
+            <a:schemeClr val="accent1"/>
+          </a:lnRef>
+          <a:fillRef idx="0">
+            <a:schemeClr val="accent1"/>
+          </a:fillRef>
+          <a:effectRef idx="0">
+            <a:schemeClr val="accent1"/>
+          </a:effectRef>
+          <a:fontRef idx="minor">
+            <a:schemeClr val="tx1"/>
+          </a:fontRef>
+        </p:style>
+      </p:cxnSp>
     </p:spTree>
+    <p:extLst>
+      <p:ext uri="{BB962C8B-B14F-4D97-AF65-F5344CB8AC3E}">
+        <p14:creationId xmlns:p14="http://schemas.microsoft.com/office/powerpoint/2010/main" val="827382471"/>
+      </p:ext>
+    </p:extLst>
   </p:cSld>
   <p:clrMapOvr>
     <a:masterClrMapping/>
@@ -3289,9 +4363,10 @@
           </a:lstStyle>
           <a:p>
             <a:r>
-              <a:rPr lang="en-US" dirty="0"/>
+              <a:rPr lang="en-GB"/>
               <a:t>Click to edit Master title style</a:t>
             </a:r>
+            <a:endParaRPr lang="en-US" dirty="0"/>
           </a:p>
         </p:txBody>
       </p:sp>
@@ -3313,7 +4388,7 @@
             <a:fld id="{1D8BD707-D9CF-40AE-B4C6-C98DA3205C09}" type="datetimeFigureOut">
               <a:rPr lang="en-US" smtClean="0"/>
               <a:pPr/>
-              <a:t>10/9/2025</a:t>
+              <a:t>10/30/25</a:t>
             </a:fld>
             <a:endParaRPr lang="en-US"/>
           </a:p>
@@ -3366,7 +4441,7 @@
         <p:nvCxnSpPr>
           <p:cNvPr id="6" name="Straight Connector 5"/>
           <p:cNvCxnSpPr/>
-          <p:nvPr userDrawn="1"/>
+          <p:nvPr/>
         </p:nvCxnSpPr>
         <p:spPr>
           <a:xfrm>
@@ -3397,7 +4472,217 @@
           </a:fontRef>
         </p:style>
       </p:cxnSp>
+      <p:cxnSp>
+        <p:nvCxnSpPr>
+          <p:cNvPr id="7" name="Straight Connector 6">
+            <a:extLst>
+              <a:ext uri="{FF2B5EF4-FFF2-40B4-BE49-F238E27FC236}">
+                <a16:creationId xmlns:a16="http://schemas.microsoft.com/office/drawing/2014/main" id="{BDB4946F-2A50-46DF-D246-8E463A5B9E4E}"/>
+              </a:ext>
+            </a:extLst>
+          </p:cNvPr>
+          <p:cNvCxnSpPr/>
+          <p:nvPr/>
+        </p:nvCxnSpPr>
+        <p:spPr>
+          <a:xfrm>
+            <a:off x="609600" y="1447800"/>
+            <a:ext cx="11074400" cy="0"/>
+          </a:xfrm>
+          <a:prstGeom prst="line">
+            <a:avLst/>
+          </a:prstGeom>
+          <a:ln w="12700">
+            <a:solidFill>
+              <a:schemeClr val="tx1"/>
+            </a:solidFill>
+          </a:ln>
+        </p:spPr>
+        <p:style>
+          <a:lnRef idx="1">
+            <a:schemeClr val="accent1"/>
+          </a:lnRef>
+          <a:fillRef idx="0">
+            <a:schemeClr val="accent1"/>
+          </a:fillRef>
+          <a:effectRef idx="0">
+            <a:schemeClr val="accent1"/>
+          </a:effectRef>
+          <a:fontRef idx="minor">
+            <a:schemeClr val="tx1"/>
+          </a:fontRef>
+        </p:style>
+      </p:cxnSp>
+      <p:cxnSp>
+        <p:nvCxnSpPr>
+          <p:cNvPr id="8" name="Straight Connector 7">
+            <a:extLst>
+              <a:ext uri="{FF2B5EF4-FFF2-40B4-BE49-F238E27FC236}">
+                <a16:creationId xmlns:a16="http://schemas.microsoft.com/office/drawing/2014/main" id="{CCF61A43-37C0-D158-13BE-1753663F3BEC}"/>
+              </a:ext>
+            </a:extLst>
+          </p:cNvPr>
+          <p:cNvCxnSpPr/>
+          <p:nvPr/>
+        </p:nvCxnSpPr>
+        <p:spPr>
+          <a:xfrm>
+            <a:off x="609600" y="1447800"/>
+            <a:ext cx="11074400" cy="0"/>
+          </a:xfrm>
+          <a:prstGeom prst="line">
+            <a:avLst/>
+          </a:prstGeom>
+          <a:ln w="12700">
+            <a:solidFill>
+              <a:schemeClr val="tx1"/>
+            </a:solidFill>
+          </a:ln>
+        </p:spPr>
+        <p:style>
+          <a:lnRef idx="1">
+            <a:schemeClr val="accent1"/>
+          </a:lnRef>
+          <a:fillRef idx="0">
+            <a:schemeClr val="accent1"/>
+          </a:fillRef>
+          <a:effectRef idx="0">
+            <a:schemeClr val="accent1"/>
+          </a:effectRef>
+          <a:fontRef idx="minor">
+            <a:schemeClr val="tx1"/>
+          </a:fontRef>
+        </p:style>
+      </p:cxnSp>
+      <p:cxnSp>
+        <p:nvCxnSpPr>
+          <p:cNvPr id="9" name="Straight Connector 8">
+            <a:extLst>
+              <a:ext uri="{FF2B5EF4-FFF2-40B4-BE49-F238E27FC236}">
+                <a16:creationId xmlns:a16="http://schemas.microsoft.com/office/drawing/2014/main" id="{3D85FD0A-2A17-4E36-7ACE-8DDECE72BE20}"/>
+              </a:ext>
+            </a:extLst>
+          </p:cNvPr>
+          <p:cNvCxnSpPr/>
+          <p:nvPr/>
+        </p:nvCxnSpPr>
+        <p:spPr>
+          <a:xfrm>
+            <a:off x="609600" y="1447800"/>
+            <a:ext cx="11074400" cy="0"/>
+          </a:xfrm>
+          <a:prstGeom prst="line">
+            <a:avLst/>
+          </a:prstGeom>
+          <a:ln w="12700">
+            <a:solidFill>
+              <a:schemeClr val="tx1"/>
+            </a:solidFill>
+          </a:ln>
+        </p:spPr>
+        <p:style>
+          <a:lnRef idx="1">
+            <a:schemeClr val="accent1"/>
+          </a:lnRef>
+          <a:fillRef idx="0">
+            <a:schemeClr val="accent1"/>
+          </a:fillRef>
+          <a:effectRef idx="0">
+            <a:schemeClr val="accent1"/>
+          </a:effectRef>
+          <a:fontRef idx="minor">
+            <a:schemeClr val="tx1"/>
+          </a:fontRef>
+        </p:style>
+      </p:cxnSp>
+      <p:cxnSp>
+        <p:nvCxnSpPr>
+          <p:cNvPr id="10" name="Straight Connector 9">
+            <a:extLst>
+              <a:ext uri="{FF2B5EF4-FFF2-40B4-BE49-F238E27FC236}">
+                <a16:creationId xmlns:a16="http://schemas.microsoft.com/office/drawing/2014/main" id="{037180BA-0CE4-6687-797D-9C4100B1A0B8}"/>
+              </a:ext>
+            </a:extLst>
+          </p:cNvPr>
+          <p:cNvCxnSpPr/>
+          <p:nvPr/>
+        </p:nvCxnSpPr>
+        <p:spPr>
+          <a:xfrm>
+            <a:off x="609600" y="1447800"/>
+            <a:ext cx="11074400" cy="0"/>
+          </a:xfrm>
+          <a:prstGeom prst="line">
+            <a:avLst/>
+          </a:prstGeom>
+          <a:ln w="12700">
+            <a:solidFill>
+              <a:schemeClr val="tx1"/>
+            </a:solidFill>
+          </a:ln>
+        </p:spPr>
+        <p:style>
+          <a:lnRef idx="1">
+            <a:schemeClr val="accent1"/>
+          </a:lnRef>
+          <a:fillRef idx="0">
+            <a:schemeClr val="accent1"/>
+          </a:fillRef>
+          <a:effectRef idx="0">
+            <a:schemeClr val="accent1"/>
+          </a:effectRef>
+          <a:fontRef idx="minor">
+            <a:schemeClr val="tx1"/>
+          </a:fontRef>
+        </p:style>
+      </p:cxnSp>
+      <p:cxnSp>
+        <p:nvCxnSpPr>
+          <p:cNvPr id="11" name="Straight Connector 10">
+            <a:extLst>
+              <a:ext uri="{FF2B5EF4-FFF2-40B4-BE49-F238E27FC236}">
+                <a16:creationId xmlns:a16="http://schemas.microsoft.com/office/drawing/2014/main" id="{EF5A262A-6F73-6AD8-6CF1-50647AC35AE8}"/>
+              </a:ext>
+            </a:extLst>
+          </p:cNvPr>
+          <p:cNvCxnSpPr/>
+          <p:nvPr userDrawn="1"/>
+        </p:nvCxnSpPr>
+        <p:spPr>
+          <a:xfrm>
+            <a:off x="609600" y="1447800"/>
+            <a:ext cx="11074400" cy="0"/>
+          </a:xfrm>
+          <a:prstGeom prst="line">
+            <a:avLst/>
+          </a:prstGeom>
+          <a:ln w="12700">
+            <a:solidFill>
+              <a:schemeClr val="tx1"/>
+            </a:solidFill>
+          </a:ln>
+        </p:spPr>
+        <p:style>
+          <a:lnRef idx="1">
+            <a:schemeClr val="accent1"/>
+          </a:lnRef>
+          <a:fillRef idx="0">
+            <a:schemeClr val="accent1"/>
+          </a:fillRef>
+          <a:effectRef idx="0">
+            <a:schemeClr val="accent1"/>
+          </a:effectRef>
+          <a:fontRef idx="minor">
+            <a:schemeClr val="tx1"/>
+          </a:fontRef>
+        </p:style>
+      </p:cxnSp>
     </p:spTree>
+    <p:extLst>
+      <p:ext uri="{BB962C8B-B14F-4D97-AF65-F5344CB8AC3E}">
+        <p14:creationId xmlns:p14="http://schemas.microsoft.com/office/powerpoint/2010/main" val="292942814"/>
+      </p:ext>
+    </p:extLst>
   </p:cSld>
   <p:clrMapOvr>
     <a:masterClrMapping/>
@@ -3440,7 +4725,7 @@
             <a:fld id="{1D8BD707-D9CF-40AE-B4C6-C98DA3205C09}" type="datetimeFigureOut">
               <a:rPr lang="en-US" smtClean="0"/>
               <a:pPr/>
-              <a:t>10/9/2025</a:t>
+              <a:t>10/30/25</a:t>
             </a:fld>
             <a:endParaRPr lang="en-US"/>
           </a:p>
@@ -3490,6 +4775,11 @@
         </p:txBody>
       </p:sp>
     </p:spTree>
+    <p:extLst>
+      <p:ext uri="{BB962C8B-B14F-4D97-AF65-F5344CB8AC3E}">
+        <p14:creationId xmlns:p14="http://schemas.microsoft.com/office/powerpoint/2010/main" val="3167056654"/>
+      </p:ext>
+    </p:extLst>
   </p:cSld>
   <p:clrMapOvr>
     <a:masterClrMapping/>
@@ -3539,9 +4829,10 @@
           </a:lstStyle>
           <a:p>
             <a:r>
-              <a:rPr lang="en-US"/>
+              <a:rPr lang="en-GB"/>
               <a:t>Click to edit Master title style</a:t>
             </a:r>
+            <a:endParaRPr lang="en-US"/>
           </a:p>
         </p:txBody>
       </p:sp>
@@ -3595,37 +4886,38 @@
           <a:p>
             <a:pPr lvl="0"/>
             <a:r>
-              <a:rPr lang="en-US"/>
+              <a:rPr lang="en-GB"/>
               <a:t>Click to edit Master text styles</a:t>
             </a:r>
           </a:p>
           <a:p>
             <a:pPr lvl="1"/>
             <a:r>
-              <a:rPr lang="en-US"/>
+              <a:rPr lang="en-GB"/>
               <a:t>Second level</a:t>
             </a:r>
           </a:p>
           <a:p>
             <a:pPr lvl="2"/>
             <a:r>
-              <a:rPr lang="en-US"/>
+              <a:rPr lang="en-GB"/>
               <a:t>Third level</a:t>
             </a:r>
           </a:p>
           <a:p>
             <a:pPr lvl="3"/>
             <a:r>
-              <a:rPr lang="en-US"/>
+              <a:rPr lang="en-GB"/>
               <a:t>Fourth level</a:t>
             </a:r>
           </a:p>
           <a:p>
             <a:pPr lvl="4"/>
             <a:r>
-              <a:rPr lang="en-US"/>
+              <a:rPr lang="en-GB"/>
               <a:t>Fifth level</a:t>
             </a:r>
+            <a:endParaRPr lang="en-US"/>
           </a:p>
         </p:txBody>
       </p:sp>
@@ -3688,7 +4980,7 @@
           <a:p>
             <a:pPr lvl="0"/>
             <a:r>
-              <a:rPr lang="en-US"/>
+              <a:rPr lang="en-GB"/>
               <a:t>Click to edit Master text styles</a:t>
             </a:r>
           </a:p>
@@ -3712,7 +5004,7 @@
             <a:fld id="{1D8BD707-D9CF-40AE-B4C6-C98DA3205C09}" type="datetimeFigureOut">
               <a:rPr lang="en-US" smtClean="0"/>
               <a:pPr/>
-              <a:t>10/9/2025</a:t>
+              <a:t>10/30/25</a:t>
             </a:fld>
             <a:endParaRPr lang="en-US"/>
           </a:p>
@@ -3762,6 +5054,11 @@
         </p:txBody>
       </p:sp>
     </p:spTree>
+    <p:extLst>
+      <p:ext uri="{BB962C8B-B14F-4D97-AF65-F5344CB8AC3E}">
+        <p14:creationId xmlns:p14="http://schemas.microsoft.com/office/powerpoint/2010/main" val="3635198623"/>
+      </p:ext>
+    </p:extLst>
   </p:cSld>
   <p:clrMapOvr>
     <a:masterClrMapping/>
@@ -3811,9 +5108,10 @@
           </a:lstStyle>
           <a:p>
             <a:r>
-              <a:rPr lang="en-US"/>
+              <a:rPr lang="en-GB"/>
               <a:t>Click to edit Master title style</a:t>
             </a:r>
+            <a:endParaRPr lang="en-US"/>
           </a:p>
         </p:txBody>
       </p:sp>
@@ -3874,6 +5172,10 @@
             </a:lvl9pPr>
           </a:lstStyle>
           <a:p>
+            <a:r>
+              <a:rPr lang="en-GB"/>
+              <a:t>Click icon to add picture</a:t>
+            </a:r>
             <a:endParaRPr lang="en-US"/>
           </a:p>
         </p:txBody>
@@ -3937,7 +5239,7 @@
           <a:p>
             <a:pPr lvl="0"/>
             <a:r>
-              <a:rPr lang="en-US"/>
+              <a:rPr lang="en-GB"/>
               <a:t>Click to edit Master text styles</a:t>
             </a:r>
           </a:p>
@@ -3961,7 +5263,7 @@
             <a:fld id="{1D8BD707-D9CF-40AE-B4C6-C98DA3205C09}" type="datetimeFigureOut">
               <a:rPr lang="en-US" smtClean="0"/>
               <a:pPr/>
-              <a:t>10/9/2025</a:t>
+              <a:t>10/30/25</a:t>
             </a:fld>
             <a:endParaRPr lang="en-US"/>
           </a:p>
@@ -4011,6 +5313,11 @@
         </p:txBody>
       </p:sp>
     </p:spTree>
+    <p:extLst>
+      <p:ext uri="{BB962C8B-B14F-4D97-AF65-F5344CB8AC3E}">
+        <p14:creationId xmlns:p14="http://schemas.microsoft.com/office/powerpoint/2010/main" val="3399364060"/>
+      </p:ext>
+    </p:extLst>
   </p:cSld>
   <p:clrMapOvr>
     <a:masterClrMapping/>
@@ -4022,9 +5329,14 @@
 <p:sldMaster xmlns:a="http://schemas.openxmlformats.org/drawingml/2006/main" xmlns:r="http://schemas.openxmlformats.org/officeDocument/2006/relationships" xmlns:p="http://schemas.openxmlformats.org/presentationml/2006/main">
   <p:cSld>
     <p:bg>
-      <p:bgRef idx="1001">
-        <a:schemeClr val="bg1"/>
-      </p:bgRef>
+      <p:bgPr>
+        <a:solidFill>
+          <a:schemeClr val="bg1">
+            <a:lumMod val="85000"/>
+          </a:schemeClr>
+        </a:solidFill>
+        <a:effectLst/>
+      </p:bgPr>
     </p:bg>
     <p:spTree>
       <p:nvGrpSpPr>
@@ -4066,9 +5378,10 @@
           <a:lstStyle/>
           <a:p>
             <a:r>
-              <a:rPr lang="en-US"/>
+              <a:rPr lang="en-GB"/>
               <a:t>Click to edit Master title style</a:t>
             </a:r>
+            <a:endParaRPr lang="en-US"/>
           </a:p>
         </p:txBody>
       </p:sp>
@@ -4099,37 +5412,38 @@
           <a:p>
             <a:pPr lvl="0"/>
             <a:r>
-              <a:rPr lang="en-US"/>
+              <a:rPr lang="en-GB"/>
               <a:t>Click to edit Master text styles</a:t>
             </a:r>
           </a:p>
           <a:p>
             <a:pPr lvl="1"/>
             <a:r>
-              <a:rPr lang="en-US"/>
+              <a:rPr lang="en-GB"/>
               <a:t>Second level</a:t>
             </a:r>
           </a:p>
           <a:p>
             <a:pPr lvl="2"/>
             <a:r>
-              <a:rPr lang="en-US"/>
+              <a:rPr lang="en-GB"/>
               <a:t>Third level</a:t>
             </a:r>
           </a:p>
           <a:p>
             <a:pPr lvl="3"/>
             <a:r>
-              <a:rPr lang="en-US"/>
+              <a:rPr lang="en-GB"/>
               <a:t>Fourth level</a:t>
             </a:r>
           </a:p>
           <a:p>
             <a:pPr lvl="4"/>
             <a:r>
-              <a:rPr lang="en-US"/>
+              <a:rPr lang="en-GB"/>
               <a:t>Fifth level</a:t>
             </a:r>
+            <a:endParaRPr lang="en-US"/>
           </a:p>
         </p:txBody>
       </p:sp>
@@ -4169,7 +5483,7 @@
             <a:fld id="{1D8BD707-D9CF-40AE-B4C6-C98DA3205C09}" type="datetimeFigureOut">
               <a:rPr lang="en-US" smtClean="0"/>
               <a:pPr/>
-              <a:t>10/9/2025</a:t>
+              <a:t>10/30/25</a:t>
             </a:fld>
             <a:endParaRPr lang="en-US"/>
           </a:p>
@@ -4255,20 +5569,29 @@
         </p:txBody>
       </p:sp>
     </p:spTree>
+    <p:extLst>
+      <p:ext uri="{BB962C8B-B14F-4D97-AF65-F5344CB8AC3E}">
+        <p14:creationId xmlns:p14="http://schemas.microsoft.com/office/powerpoint/2010/main" val="716467076"/>
+      </p:ext>
+    </p:extLst>
   </p:cSld>
   <p:clrMap bg1="lt1" tx1="dk1" bg2="lt2" tx2="dk2" accent1="accent1" accent2="accent2" accent3="accent3" accent4="accent4" accent5="accent5" accent6="accent6" hlink="hlink" folHlink="folHlink"/>
   <p:sldLayoutIdLst>
-    <p:sldLayoutId id="2147483649" r:id="rId1"/>
-    <p:sldLayoutId id="2147483650" r:id="rId2"/>
-    <p:sldLayoutId id="2147483651" r:id="rId3"/>
-    <p:sldLayoutId id="2147483652" r:id="rId4"/>
-    <p:sldLayoutId id="2147483653" r:id="rId5"/>
-    <p:sldLayoutId id="2147483654" r:id="rId6"/>
-    <p:sldLayoutId id="2147483655" r:id="rId7"/>
-    <p:sldLayoutId id="2147483656" r:id="rId8"/>
-    <p:sldLayoutId id="2147483657" r:id="rId9"/>
-    <p:sldLayoutId id="2147483658" r:id="rId10"/>
-    <p:sldLayoutId id="2147483659" r:id="rId11"/>
+    <p:sldLayoutId id="2147483661" r:id="rId1"/>
+    <p:sldLayoutId id="2147483662" r:id="rId2"/>
+    <p:sldLayoutId id="2147483663" r:id="rId3"/>
+    <p:sldLayoutId id="2147483664" r:id="rId4"/>
+    <p:sldLayoutId id="2147483665" r:id="rId5"/>
+    <p:sldLayoutId id="2147483666" r:id="rId6"/>
+    <p:sldLayoutId id="2147483667" r:id="rId7"/>
+    <p:sldLayoutId id="2147483668" r:id="rId8"/>
+    <p:sldLayoutId id="2147483669" r:id="rId9"/>
+    <p:sldLayoutId id="2147483670" r:id="rId10"/>
+    <p:sldLayoutId id="2147483671" r:id="rId11"/>
+    <p:sldLayoutId id="2147483672" r:id="rId12"/>
+    <p:sldLayoutId id="2147483673" r:id="rId13"/>
+    <p:sldLayoutId id="2147483674" r:id="rId14"/>
+    <p:sldLayoutId id="2147483675" r:id="rId15"/>
   </p:sldLayoutIdLst>
   <p:txStyles>
     <p:titleStyle>
@@ -5095,7 +6418,7 @@
         </p:nvSpPr>
         <p:spPr>
           <a:xfrm>
-            <a:off x="3048000" y="2359001"/>
+            <a:off x="685800" y="1828800"/>
             <a:ext cx="8839200" cy="4525963"/>
           </a:xfrm>
         </p:spPr>
@@ -5127,10 +6450,10 @@
       </p:sp>
       <p:pic>
         <p:nvPicPr>
-          <p:cNvPr id="6" name="Picture 5">
+          <p:cNvPr id="4" name="Picture 3">
             <a:extLst>
               <a:ext uri="{FF2B5EF4-FFF2-40B4-BE49-F238E27FC236}">
-                <a16:creationId xmlns:a16="http://schemas.microsoft.com/office/drawing/2014/main" id="{0E584694-BEDF-9B68-EC62-6E5C539C60D1}"/>
+                <a16:creationId xmlns:a16="http://schemas.microsoft.com/office/drawing/2014/main" id="{87DD7AC6-7855-F782-C7A4-BCD234FF04AB}"/>
               </a:ext>
             </a:extLst>
           </p:cNvPr>
@@ -5147,12 +6470,18 @@
         </p:blipFill>
         <p:spPr>
           <a:xfrm>
-            <a:off x="152400" y="2792698"/>
-            <a:ext cx="3345505" cy="1272604"/>
+            <a:off x="3944754" y="4876800"/>
+            <a:ext cx="5562600" cy="1066800"/>
           </a:xfrm>
           <a:prstGeom prst="rect">
             <a:avLst/>
           </a:prstGeom>
+          <a:solidFill>
+            <a:schemeClr val="accent6">
+              <a:lumMod val="40000"/>
+              <a:lumOff val="60000"/>
+            </a:schemeClr>
+          </a:solidFill>
         </p:spPr>
       </p:pic>
     </p:spTree>
@@ -5165,6 +6494,127 @@
   <p:clrMapOvr>
     <a:masterClrMapping/>
   </p:clrMapOvr>
+  <p:timing>
+    <p:tnLst>
+      <p:par>
+        <p:cTn id="1" dur="indefinite" restart="never" nodeType="tmRoot">
+          <p:childTnLst>
+            <p:seq concurrent="1" nextAc="seek">
+              <p:cTn id="2" dur="indefinite" nodeType="mainSeq">
+                <p:childTnLst>
+                  <p:par>
+                    <p:cTn id="3" fill="hold">
+                      <p:stCondLst>
+                        <p:cond delay="indefinite"/>
+                      </p:stCondLst>
+                      <p:childTnLst>
+                        <p:par>
+                          <p:cTn id="4" fill="hold">
+                            <p:stCondLst>
+                              <p:cond delay="0"/>
+                            </p:stCondLst>
+                            <p:childTnLst>
+                              <p:par>
+                                <p:cTn id="5" presetID="2" presetClass="entr" presetSubtype="4" fill="hold" nodeType="clickEffect">
+                                  <p:stCondLst>
+                                    <p:cond delay="0"/>
+                                  </p:stCondLst>
+                                  <p:childTnLst>
+                                    <p:set>
+                                      <p:cBhvr>
+                                        <p:cTn id="6" dur="1" fill="hold">
+                                          <p:stCondLst>
+                                            <p:cond delay="0"/>
+                                          </p:stCondLst>
+                                        </p:cTn>
+                                        <p:tgtEl>
+                                          <p:spTgt spid="4"/>
+                                        </p:tgtEl>
+                                        <p:attrNameLst>
+                                          <p:attrName>style.visibility</p:attrName>
+                                        </p:attrNameLst>
+                                      </p:cBhvr>
+                                      <p:to>
+                                        <p:strVal val="visible"/>
+                                      </p:to>
+                                    </p:set>
+                                    <p:anim calcmode="lin" valueType="num">
+                                      <p:cBhvr additive="base">
+                                        <p:cTn id="7" dur="500" fill="hold"/>
+                                        <p:tgtEl>
+                                          <p:spTgt spid="4"/>
+                                        </p:tgtEl>
+                                        <p:attrNameLst>
+                                          <p:attrName>ppt_x</p:attrName>
+                                        </p:attrNameLst>
+                                      </p:cBhvr>
+                                      <p:tavLst>
+                                        <p:tav tm="0">
+                                          <p:val>
+                                            <p:strVal val="#ppt_x"/>
+                                          </p:val>
+                                        </p:tav>
+                                        <p:tav tm="100000">
+                                          <p:val>
+                                            <p:strVal val="#ppt_x"/>
+                                          </p:val>
+                                        </p:tav>
+                                      </p:tavLst>
+                                    </p:anim>
+                                    <p:anim calcmode="lin" valueType="num">
+                                      <p:cBhvr additive="base">
+                                        <p:cTn id="8" dur="500" fill="hold"/>
+                                        <p:tgtEl>
+                                          <p:spTgt spid="4"/>
+                                        </p:tgtEl>
+                                        <p:attrNameLst>
+                                          <p:attrName>ppt_y</p:attrName>
+                                        </p:attrNameLst>
+                                      </p:cBhvr>
+                                      <p:tavLst>
+                                        <p:tav tm="0">
+                                          <p:val>
+                                            <p:strVal val="1+#ppt_h/2"/>
+                                          </p:val>
+                                        </p:tav>
+                                        <p:tav tm="100000">
+                                          <p:val>
+                                            <p:strVal val="#ppt_y"/>
+                                          </p:val>
+                                        </p:tav>
+                                      </p:tavLst>
+                                    </p:anim>
+                                  </p:childTnLst>
+                                </p:cTn>
+                              </p:par>
+                            </p:childTnLst>
+                          </p:cTn>
+                        </p:par>
+                      </p:childTnLst>
+                    </p:cTn>
+                  </p:par>
+                </p:childTnLst>
+              </p:cTn>
+              <p:prevCondLst>
+                <p:cond evt="onPrev" delay="0">
+                  <p:tgtEl>
+                    <p:sldTgt/>
+                  </p:tgtEl>
+                </p:cond>
+              </p:prevCondLst>
+              <p:nextCondLst>
+                <p:cond evt="onNext" delay="0">
+                  <p:tgtEl>
+                    <p:sldTgt/>
+                  </p:tgtEl>
+                </p:cond>
+              </p:nextCondLst>
+            </p:seq>
+          </p:childTnLst>
+        </p:cTn>
+      </p:par>
+    </p:tnLst>
+  </p:timing>
 </p:sld>
 </file>
 
@@ -5187,10 +6637,10 @@
       </p:grpSpPr>
       <p:pic>
         <p:nvPicPr>
-          <p:cNvPr id="4" name="Picture 3">
+          <p:cNvPr id="17" name="Picture 16">
             <a:extLst>
               <a:ext uri="{FF2B5EF4-FFF2-40B4-BE49-F238E27FC236}">
-                <a16:creationId xmlns:a16="http://schemas.microsoft.com/office/drawing/2014/main" id="{8C505C1F-8421-75D2-099B-2443F752C8E3}"/>
+                <a16:creationId xmlns:a16="http://schemas.microsoft.com/office/drawing/2014/main" id="{3B8E49B9-4B01-1BED-79E1-B5D6FAF004CA}"/>
               </a:ext>
             </a:extLst>
           </p:cNvPr>
@@ -5207,187 +6657,74 @@
         </p:blipFill>
         <p:spPr>
           <a:xfrm>
-            <a:off x="3345193" y="3500652"/>
-            <a:ext cx="8234517" cy="3357348"/>
+            <a:off x="3086100" y="3478624"/>
+            <a:ext cx="7772400" cy="3583815"/>
           </a:xfrm>
           <a:prstGeom prst="rect">
             <a:avLst/>
           </a:prstGeom>
         </p:spPr>
       </p:pic>
-      <p:grpSp>
-        <p:nvGrpSpPr>
-          <p:cNvPr id="15" name="Group 14">
+      <p:pic>
+        <p:nvPicPr>
+          <p:cNvPr id="11" name="Picture 10">
             <a:extLst>
               <a:ext uri="{FF2B5EF4-FFF2-40B4-BE49-F238E27FC236}">
-                <a16:creationId xmlns:a16="http://schemas.microsoft.com/office/drawing/2014/main" id="{36A71A8F-D386-DF30-1AC3-E1EE1D44DAC4}"/>
+                <a16:creationId xmlns:a16="http://schemas.microsoft.com/office/drawing/2014/main" id="{1DD3899D-BFDB-CD06-0E0E-63BAACFBFDD7}"/>
               </a:ext>
             </a:extLst>
           </p:cNvPr>
-          <p:cNvGrpSpPr/>
+          <p:cNvPicPr>
+            <a:picLocks noChangeAspect="1"/>
+          </p:cNvPicPr>
           <p:nvPr/>
-        </p:nvGrpSpPr>
-        <p:grpSpPr>
+        </p:nvPicPr>
+        <p:blipFill>
+          <a:blip r:embed="rId4"/>
+          <a:stretch>
+            <a:fillRect/>
+          </a:stretch>
+        </p:blipFill>
+        <p:spPr>
           <a:xfrm>
-            <a:off x="5486400" y="37207"/>
-            <a:ext cx="5796648" cy="3883754"/>
-            <a:chOff x="5486400" y="37207"/>
-            <a:chExt cx="5796648" cy="3883754"/>
-          </a:xfrm>
-        </p:grpSpPr>
-        <p:pic>
-          <p:nvPicPr>
-            <p:cNvPr id="7" name="Picture 6">
-              <a:extLst>
-                <a:ext uri="{FF2B5EF4-FFF2-40B4-BE49-F238E27FC236}">
-                  <a16:creationId xmlns:a16="http://schemas.microsoft.com/office/drawing/2014/main" id="{1DC092A9-35ED-0A91-DEC0-640086411E8C}"/>
-                </a:ext>
-              </a:extLst>
-            </p:cNvPr>
-            <p:cNvPicPr>
-              <a:picLocks noChangeAspect="1"/>
-            </p:cNvPicPr>
-            <p:nvPr/>
-          </p:nvPicPr>
-          <p:blipFill>
-            <a:blip r:embed="rId4"/>
-            <a:stretch>
-              <a:fillRect/>
-            </a:stretch>
-          </p:blipFill>
-          <p:spPr>
-            <a:xfrm>
-              <a:off x="5486400" y="37207"/>
-              <a:ext cx="5796648" cy="3883754"/>
-            </a:xfrm>
-            <a:prstGeom prst="rect">
-              <a:avLst/>
-            </a:prstGeom>
-            <a:ln w="38100" cap="sq">
-              <a:solidFill>
-                <a:srgbClr val="000000"/>
-              </a:solidFill>
-              <a:prstDash val="solid"/>
-              <a:miter lim="800000"/>
-            </a:ln>
-            <a:effectLst>
-              <a:outerShdw blurRad="50800" dist="38100" dir="2700000" algn="tl" rotWithShape="0">
-                <a:srgbClr val="000000">
-                  <a:alpha val="43000"/>
-                </a:srgbClr>
-              </a:outerShdw>
-            </a:effectLst>
-          </p:spPr>
-        </p:pic>
-        <p:sp>
-          <p:nvSpPr>
-            <p:cNvPr id="13" name="Rectangle 12">
-              <a:extLst>
-                <a:ext uri="{FF2B5EF4-FFF2-40B4-BE49-F238E27FC236}">
-                  <a16:creationId xmlns:a16="http://schemas.microsoft.com/office/drawing/2014/main" id="{86D64D11-1B0A-1936-7711-30B51A9AA999}"/>
-                </a:ext>
-              </a:extLst>
-            </p:cNvPr>
-            <p:cNvSpPr/>
-            <p:nvPr/>
-          </p:nvSpPr>
-          <p:spPr>
-            <a:xfrm>
-              <a:off x="5562600" y="37207"/>
-              <a:ext cx="1143000" cy="419993"/>
-            </a:xfrm>
-            <a:prstGeom prst="rect">
-              <a:avLst/>
-            </a:prstGeom>
-            <a:solidFill>
-              <a:schemeClr val="bg1"/>
-            </a:solidFill>
-            <a:ln>
-              <a:solidFill>
-                <a:schemeClr val="bg1"/>
-              </a:solidFill>
-            </a:ln>
-          </p:spPr>
-          <p:style>
-            <a:lnRef idx="2">
-              <a:schemeClr val="accent1">
-                <a:shade val="15000"/>
-              </a:schemeClr>
-            </a:lnRef>
-            <a:fillRef idx="1">
-              <a:schemeClr val="accent1"/>
-            </a:fillRef>
-            <a:effectRef idx="0">
-              <a:schemeClr val="accent1"/>
-            </a:effectRef>
-            <a:fontRef idx="minor">
-              <a:schemeClr val="lt1"/>
-            </a:fontRef>
-          </p:style>
-          <p:txBody>
-            <a:bodyPr rtlCol="0" anchor="ctr"/>
-            <a:lstStyle/>
-            <a:p>
-              <a:pPr algn="ctr"/>
-              <a:endParaRPr lang="en-IE"/>
-            </a:p>
-          </p:txBody>
-        </p:sp>
-        <p:sp>
-          <p:nvSpPr>
-            <p:cNvPr id="14" name="Rectangle 13">
-              <a:extLst>
-                <a:ext uri="{FF2B5EF4-FFF2-40B4-BE49-F238E27FC236}">
-                  <a16:creationId xmlns:a16="http://schemas.microsoft.com/office/drawing/2014/main" id="{9DBED959-C5FE-D727-D109-F4EC1A957739}"/>
-                </a:ext>
-              </a:extLst>
-            </p:cNvPr>
-            <p:cNvSpPr/>
-            <p:nvPr/>
-          </p:nvSpPr>
-          <p:spPr>
-            <a:xfrm>
-              <a:off x="9133242" y="37207"/>
-              <a:ext cx="1143000" cy="419993"/>
-            </a:xfrm>
-            <a:prstGeom prst="rect">
-              <a:avLst/>
-            </a:prstGeom>
-            <a:solidFill>
-              <a:schemeClr val="bg1"/>
-            </a:solidFill>
-            <a:ln>
-              <a:solidFill>
-                <a:schemeClr val="bg1"/>
-              </a:solidFill>
-            </a:ln>
-          </p:spPr>
-          <p:style>
-            <a:lnRef idx="2">
-              <a:schemeClr val="accent1">
-                <a:shade val="15000"/>
-              </a:schemeClr>
-            </a:lnRef>
-            <a:fillRef idx="1">
-              <a:schemeClr val="accent1"/>
-            </a:fillRef>
-            <a:effectRef idx="0">
-              <a:schemeClr val="accent1"/>
-            </a:effectRef>
-            <a:fontRef idx="minor">
-              <a:schemeClr val="lt1"/>
-            </a:fontRef>
-          </p:style>
-          <p:txBody>
-            <a:bodyPr rtlCol="0" anchor="ctr"/>
-            <a:lstStyle/>
-            <a:p>
-              <a:pPr algn="ctr"/>
-              <a:endParaRPr lang="en-IE"/>
-            </a:p>
-          </p:txBody>
-        </p:sp>
-      </p:grpSp>
+            <a:off x="4953000" y="-25834"/>
+            <a:ext cx="6575692" cy="4038986"/>
+          </a:xfrm>
+          <a:prstGeom prst="rect">
+            <a:avLst/>
+          </a:prstGeom>
+        </p:spPr>
+      </p:pic>
+      <p:pic>
+        <p:nvPicPr>
+          <p:cNvPr id="6" name="Picture 5">
+            <a:extLst>
+              <a:ext uri="{FF2B5EF4-FFF2-40B4-BE49-F238E27FC236}">
+                <a16:creationId xmlns:a16="http://schemas.microsoft.com/office/drawing/2014/main" id="{84A756F8-7D2C-8A69-8290-E5540835C597}"/>
+              </a:ext>
+            </a:extLst>
+          </p:cNvPr>
+          <p:cNvPicPr>
+            <a:picLocks noChangeAspect="1"/>
+          </p:cNvPicPr>
+          <p:nvPr/>
+        </p:nvPicPr>
+        <p:blipFill>
+          <a:blip r:embed="rId4"/>
+          <a:stretch>
+            <a:fillRect/>
+          </a:stretch>
+        </p:blipFill>
+        <p:spPr>
+          <a:xfrm>
+            <a:off x="4899292" y="-106589"/>
+            <a:ext cx="6575692" cy="4038986"/>
+          </a:xfrm>
+          <a:prstGeom prst="rect">
+            <a:avLst/>
+          </a:prstGeom>
+        </p:spPr>
+      </p:pic>
       <p:sp>
         <p:nvSpPr>
           <p:cNvPr id="2" name="Title 1"/>
@@ -5410,7 +6747,7 @@
             </a:br>
             <a:r>
               <a:rPr lang="en-IE" b="1" dirty="0"/>
-              <a:t>Example 3.2</a:t>
+              <a:t>Example 2</a:t>
             </a:r>
           </a:p>
         </p:txBody>
@@ -5423,8 +6760,8 @@
         </p:nvSpPr>
         <p:spPr>
           <a:xfrm>
-            <a:off x="5701622" y="2121522"/>
-            <a:ext cx="5562600" cy="1244831"/>
+            <a:off x="5334000" y="2451086"/>
+            <a:ext cx="6019800" cy="1143000"/>
           </a:xfrm>
           <a:prstGeom prst="rect">
             <a:avLst/>
@@ -5469,7 +6806,7 @@
         </p:nvSpPr>
         <p:spPr>
           <a:xfrm>
-            <a:off x="4953000" y="6003975"/>
+            <a:off x="3886200" y="6116246"/>
             <a:ext cx="3962400" cy="413832"/>
           </a:xfrm>
           <a:prstGeom prst="rect">
@@ -5523,8 +6860,8 @@
         </p:nvCxnSpPr>
         <p:spPr>
           <a:xfrm flipV="1">
-            <a:off x="7239000" y="3366353"/>
-            <a:ext cx="533400" cy="2637622"/>
+            <a:off x="5715000" y="3046021"/>
+            <a:ext cx="3352800" cy="3126179"/>
           </a:xfrm>
           <a:prstGeom prst="straightConnector1">
             <a:avLst/>
@@ -5599,10 +6936,10 @@
       </p:sp>
       <p:pic>
         <p:nvPicPr>
-          <p:cNvPr id="5" name="Picture 4">
+          <p:cNvPr id="3" name="Picture 2">
             <a:extLst>
               <a:ext uri="{FF2B5EF4-FFF2-40B4-BE49-F238E27FC236}">
-                <a16:creationId xmlns:a16="http://schemas.microsoft.com/office/drawing/2014/main" id="{D8F7437C-DCDF-C53D-B7BD-12529F24330B}"/>
+                <a16:creationId xmlns:a16="http://schemas.microsoft.com/office/drawing/2014/main" id="{E5422A6C-C504-7FDB-DFEC-11AB7CE449F6}"/>
               </a:ext>
             </a:extLst>
           </p:cNvPr>
@@ -5619,14 +6956,58 @@
         </p:blipFill>
         <p:spPr>
           <a:xfrm>
-            <a:off x="838200" y="3124200"/>
-            <a:ext cx="1943268" cy="739204"/>
+            <a:off x="228600" y="1979221"/>
+            <a:ext cx="4267200" cy="1066800"/>
           </a:xfrm>
           <a:prstGeom prst="rect">
             <a:avLst/>
           </a:prstGeom>
         </p:spPr>
       </p:pic>
+      <p:cxnSp>
+        <p:nvCxnSpPr>
+          <p:cNvPr id="21" name="Straight Arrow Connector 20">
+            <a:extLst>
+              <a:ext uri="{FF2B5EF4-FFF2-40B4-BE49-F238E27FC236}">
+                <a16:creationId xmlns:a16="http://schemas.microsoft.com/office/drawing/2014/main" id="{61A6A371-778B-B8BA-C1D1-52897DB28721}"/>
+              </a:ext>
+            </a:extLst>
+          </p:cNvPr>
+          <p:cNvCxnSpPr>
+            <a:cxnSpLocks/>
+          </p:cNvCxnSpPr>
+          <p:nvPr/>
+        </p:nvCxnSpPr>
+        <p:spPr>
+          <a:xfrm flipV="1">
+            <a:off x="6860038" y="3276600"/>
+            <a:ext cx="988562" cy="2920401"/>
+          </a:xfrm>
+          <a:prstGeom prst="straightConnector1">
+            <a:avLst/>
+          </a:prstGeom>
+          <a:ln w="38100">
+            <a:solidFill>
+              <a:srgbClr val="FF0000"/>
+            </a:solidFill>
+            <a:tailEnd type="arrow"/>
+          </a:ln>
+        </p:spPr>
+        <p:style>
+          <a:lnRef idx="1">
+            <a:schemeClr val="accent1"/>
+          </a:lnRef>
+          <a:fillRef idx="0">
+            <a:schemeClr val="accent1"/>
+          </a:fillRef>
+          <a:effectRef idx="0">
+            <a:schemeClr val="accent1"/>
+          </a:effectRef>
+          <a:fontRef idx="minor">
+            <a:schemeClr val="tx1"/>
+          </a:fontRef>
+        </p:style>
+      </p:cxnSp>
     </p:spTree>
     <p:extLst>
       <p:ext uri="{BB962C8B-B14F-4D97-AF65-F5344CB8AC3E}">
@@ -5804,6 +7185,241 @@
                       </p:childTnLst>
                     </p:cTn>
                   </p:par>
+                  <p:par>
+                    <p:cTn id="18" fill="hold">
+                      <p:stCondLst>
+                        <p:cond delay="indefinite"/>
+                      </p:stCondLst>
+                      <p:childTnLst>
+                        <p:par>
+                          <p:cTn id="19" fill="hold">
+                            <p:stCondLst>
+                              <p:cond delay="0"/>
+                            </p:stCondLst>
+                            <p:childTnLst>
+                              <p:par>
+                                <p:cTn id="20" presetID="2" presetClass="entr" presetSubtype="4" fill="hold" nodeType="clickEffect">
+                                  <p:stCondLst>
+                                    <p:cond delay="0"/>
+                                  </p:stCondLst>
+                                  <p:childTnLst>
+                                    <p:set>
+                                      <p:cBhvr>
+                                        <p:cTn id="21" dur="1" fill="hold">
+                                          <p:stCondLst>
+                                            <p:cond delay="0"/>
+                                          </p:stCondLst>
+                                        </p:cTn>
+                                        <p:tgtEl>
+                                          <p:spTgt spid="3"/>
+                                        </p:tgtEl>
+                                        <p:attrNameLst>
+                                          <p:attrName>style.visibility</p:attrName>
+                                        </p:attrNameLst>
+                                      </p:cBhvr>
+                                      <p:to>
+                                        <p:strVal val="visible"/>
+                                      </p:to>
+                                    </p:set>
+                                    <p:anim calcmode="lin" valueType="num">
+                                      <p:cBhvr additive="base">
+                                        <p:cTn id="22" dur="500" fill="hold"/>
+                                        <p:tgtEl>
+                                          <p:spTgt spid="3"/>
+                                        </p:tgtEl>
+                                        <p:attrNameLst>
+                                          <p:attrName>ppt_x</p:attrName>
+                                        </p:attrNameLst>
+                                      </p:cBhvr>
+                                      <p:tavLst>
+                                        <p:tav tm="0">
+                                          <p:val>
+                                            <p:strVal val="#ppt_x"/>
+                                          </p:val>
+                                        </p:tav>
+                                        <p:tav tm="100000">
+                                          <p:val>
+                                            <p:strVal val="#ppt_x"/>
+                                          </p:val>
+                                        </p:tav>
+                                      </p:tavLst>
+                                    </p:anim>
+                                    <p:anim calcmode="lin" valueType="num">
+                                      <p:cBhvr additive="base">
+                                        <p:cTn id="23" dur="500" fill="hold"/>
+                                        <p:tgtEl>
+                                          <p:spTgt spid="3"/>
+                                        </p:tgtEl>
+                                        <p:attrNameLst>
+                                          <p:attrName>ppt_y</p:attrName>
+                                        </p:attrNameLst>
+                                      </p:cBhvr>
+                                      <p:tavLst>
+                                        <p:tav tm="0">
+                                          <p:val>
+                                            <p:strVal val="1+#ppt_h/2"/>
+                                          </p:val>
+                                        </p:tav>
+                                        <p:tav tm="100000">
+                                          <p:val>
+                                            <p:strVal val="#ppt_y"/>
+                                          </p:val>
+                                        </p:tav>
+                                      </p:tavLst>
+                                    </p:anim>
+                                  </p:childTnLst>
+                                </p:cTn>
+                              </p:par>
+                            </p:childTnLst>
+                          </p:cTn>
+                        </p:par>
+                      </p:childTnLst>
+                    </p:cTn>
+                  </p:par>
+                  <p:par>
+                    <p:cTn id="24" fill="hold">
+                      <p:stCondLst>
+                        <p:cond delay="indefinite"/>
+                      </p:stCondLst>
+                      <p:childTnLst>
+                        <p:par>
+                          <p:cTn id="25" fill="hold">
+                            <p:stCondLst>
+                              <p:cond delay="0"/>
+                            </p:stCondLst>
+                            <p:childTnLst>
+                              <p:par>
+                                <p:cTn id="26" presetID="22" presetClass="entr" presetSubtype="1" fill="hold" nodeType="clickEffect">
+                                  <p:stCondLst>
+                                    <p:cond delay="0"/>
+                                  </p:stCondLst>
+                                  <p:childTnLst>
+                                    <p:set>
+                                      <p:cBhvr>
+                                        <p:cTn id="27" dur="1" fill="hold">
+                                          <p:stCondLst>
+                                            <p:cond delay="0"/>
+                                          </p:stCondLst>
+                                        </p:cTn>
+                                        <p:tgtEl>
+                                          <p:spTgt spid="21"/>
+                                        </p:tgtEl>
+                                        <p:attrNameLst>
+                                          <p:attrName>style.visibility</p:attrName>
+                                        </p:attrNameLst>
+                                      </p:cBhvr>
+                                      <p:to>
+                                        <p:strVal val="visible"/>
+                                      </p:to>
+                                    </p:set>
+                                    <p:animEffect transition="in" filter="wipe(up)">
+                                      <p:cBhvr>
+                                        <p:cTn id="28" dur="500"/>
+                                        <p:tgtEl>
+                                          <p:spTgt spid="21"/>
+                                        </p:tgtEl>
+                                      </p:cBhvr>
+                                    </p:animEffect>
+                                  </p:childTnLst>
+                                </p:cTn>
+                              </p:par>
+                            </p:childTnLst>
+                          </p:cTn>
+                        </p:par>
+                      </p:childTnLst>
+                    </p:cTn>
+                  </p:par>
+                  <p:par>
+                    <p:cTn id="29" fill="hold">
+                      <p:stCondLst>
+                        <p:cond delay="indefinite"/>
+                      </p:stCondLst>
+                      <p:childTnLst>
+                        <p:par>
+                          <p:cTn id="30" fill="hold">
+                            <p:stCondLst>
+                              <p:cond delay="0"/>
+                            </p:stCondLst>
+                            <p:childTnLst>
+                              <p:par>
+                                <p:cTn id="31" presetID="2" presetClass="entr" presetSubtype="4" fill="hold" nodeType="clickEffect">
+                                  <p:stCondLst>
+                                    <p:cond delay="0"/>
+                                  </p:stCondLst>
+                                  <p:childTnLst>
+                                    <p:set>
+                                      <p:cBhvr>
+                                        <p:cTn id="32" dur="1" fill="hold">
+                                          <p:stCondLst>
+                                            <p:cond delay="0"/>
+                                          </p:stCondLst>
+                                        </p:cTn>
+                                        <p:tgtEl>
+                                          <p:spTgt spid="12"/>
+                                        </p:tgtEl>
+                                        <p:attrNameLst>
+                                          <p:attrName>style.visibility</p:attrName>
+                                        </p:attrNameLst>
+                                      </p:cBhvr>
+                                      <p:to>
+                                        <p:strVal val="visible"/>
+                                      </p:to>
+                                    </p:set>
+                                    <p:anim calcmode="lin" valueType="num">
+                                      <p:cBhvr additive="base">
+                                        <p:cTn id="33" dur="500" fill="hold"/>
+                                        <p:tgtEl>
+                                          <p:spTgt spid="12"/>
+                                        </p:tgtEl>
+                                        <p:attrNameLst>
+                                          <p:attrName>ppt_x</p:attrName>
+                                        </p:attrNameLst>
+                                      </p:cBhvr>
+                                      <p:tavLst>
+                                        <p:tav tm="0">
+                                          <p:val>
+                                            <p:strVal val="#ppt_x"/>
+                                          </p:val>
+                                        </p:tav>
+                                        <p:tav tm="100000">
+                                          <p:val>
+                                            <p:strVal val="#ppt_x"/>
+                                          </p:val>
+                                        </p:tav>
+                                      </p:tavLst>
+                                    </p:anim>
+                                    <p:anim calcmode="lin" valueType="num">
+                                      <p:cBhvr additive="base">
+                                        <p:cTn id="34" dur="500" fill="hold"/>
+                                        <p:tgtEl>
+                                          <p:spTgt spid="12"/>
+                                        </p:tgtEl>
+                                        <p:attrNameLst>
+                                          <p:attrName>ppt_y</p:attrName>
+                                        </p:attrNameLst>
+                                      </p:cBhvr>
+                                      <p:tavLst>
+                                        <p:tav tm="0">
+                                          <p:val>
+                                            <p:strVal val="1+#ppt_h/2"/>
+                                          </p:val>
+                                        </p:tav>
+                                        <p:tav tm="100000">
+                                          <p:val>
+                                            <p:strVal val="#ppt_y"/>
+                                          </p:val>
+                                        </p:tav>
+                                      </p:tavLst>
+                                    </p:anim>
+                                  </p:childTnLst>
+                                </p:cTn>
+                              </p:par>
+                            </p:childTnLst>
+                          </p:cTn>
+                        </p:par>
+                      </p:childTnLst>
+                    </p:cTn>
+                  </p:par>
                 </p:childTnLst>
               </p:cTn>
               <p:prevCondLst>
@@ -5888,7 +7504,7 @@
             </a:br>
             <a:r>
               <a:rPr lang="en-IE" b="1" dirty="0"/>
-              <a:t>Example</a:t>
+              <a:t>Example 3</a:t>
             </a:r>
           </a:p>
         </p:txBody>
@@ -6019,7 +7635,7 @@
         </p:nvGrpSpPr>
         <p:grpSpPr>
           <a:xfrm>
-            <a:off x="5715000" y="37207"/>
+            <a:off x="5701678" y="474354"/>
             <a:ext cx="6109322" cy="2934593"/>
             <a:chOff x="5486400" y="37207"/>
             <a:chExt cx="5796648" cy="3883754"/>
@@ -8240,175 +9856,6 @@
 </file>
 
 <file path=ppt/slides/slide18.xml><?xml version="1.0" encoding="utf-8"?>
-<p:sld xmlns:a="http://schemas.openxmlformats.org/drawingml/2006/main" xmlns:r="http://schemas.openxmlformats.org/officeDocument/2006/relationships" xmlns:p="http://schemas.openxmlformats.org/presentationml/2006/main">
-  <p:cSld>
-    <p:bg>
-      <p:bgPr>
-        <a:solidFill>
-          <a:srgbClr val="FFFAC9"/>
-        </a:solidFill>
-        <a:effectLst/>
-      </p:bgPr>
-    </p:bg>
-    <p:spTree>
-      <p:nvGrpSpPr>
-        <p:cNvPr id="1" name=""/>
-        <p:cNvGrpSpPr/>
-        <p:nvPr/>
-      </p:nvGrpSpPr>
-      <p:grpSpPr>
-        <a:xfrm>
-          <a:off x="0" y="0"/>
-          <a:ext cx="0" cy="0"/>
-          <a:chOff x="0" y="0"/>
-          <a:chExt cx="0" cy="0"/>
-        </a:xfrm>
-      </p:grpSpPr>
-      <p:sp>
-        <p:nvSpPr>
-          <p:cNvPr id="2" name="Title 1"/>
-          <p:cNvSpPr>
-            <a:spLocks noGrp="1"/>
-          </p:cNvSpPr>
-          <p:nvPr>
-            <p:ph type="title"/>
-          </p:nvPr>
-        </p:nvSpPr>
-        <p:spPr/>
-        <p:txBody>
-          <a:bodyPr/>
-          <a:lstStyle/>
-          <a:p>
-            <a:r>
-              <a:rPr lang="en-IE" dirty="0"/>
-              <a:t>Summary</a:t>
-            </a:r>
-          </a:p>
-        </p:txBody>
-      </p:sp>
-      <p:sp>
-        <p:nvSpPr>
-          <p:cNvPr id="5" name="Content Placeholder 4"/>
-          <p:cNvSpPr>
-            <a:spLocks noGrp="1"/>
-          </p:cNvSpPr>
-          <p:nvPr>
-            <p:ph idx="1"/>
-          </p:nvPr>
-        </p:nvSpPr>
-        <p:spPr>
-          <a:xfrm>
-            <a:off x="609600" y="1600200"/>
-            <a:ext cx="8229600" cy="5105400"/>
-          </a:xfrm>
-        </p:spPr>
-        <p:txBody>
-          <a:bodyPr>
-            <a:normAutofit/>
-          </a:bodyPr>
-          <a:lstStyle/>
-          <a:p>
-            <a:pPr marL="514350" indent="-514350">
-              <a:buFont typeface="+mj-lt"/>
-              <a:buAutoNum type="arabicPeriod"/>
-            </a:pPr>
-            <a:r>
-              <a:rPr lang="en-IE" dirty="0"/>
-              <a:t>Recap of method </a:t>
-            </a:r>
-            <a:r>
-              <a:rPr lang="en-IE" b="1" dirty="0"/>
-              <a:t>terminology</a:t>
-            </a:r>
-            <a:r>
-              <a:rPr lang="en-IE" dirty="0"/>
-              <a:t>:</a:t>
-            </a:r>
-          </a:p>
-          <a:p>
-            <a:pPr lvl="1"/>
-            <a:r>
-              <a:rPr lang="en-IE" dirty="0"/>
-              <a:t>Return type</a:t>
-            </a:r>
-          </a:p>
-          <a:p>
-            <a:pPr lvl="1"/>
-            <a:r>
-              <a:rPr lang="en-IE" dirty="0"/>
-              <a:t>Method names</a:t>
-            </a:r>
-          </a:p>
-          <a:p>
-            <a:pPr lvl="1"/>
-            <a:r>
-              <a:rPr lang="en-IE" dirty="0"/>
-              <a:t>Parameter list</a:t>
-            </a:r>
-          </a:p>
-          <a:p>
-            <a:pPr marL="0" indent="0">
-              <a:buNone/>
-            </a:pPr>
-            <a:endParaRPr lang="en-IE" dirty="0"/>
-          </a:p>
-          <a:p>
-            <a:pPr marL="514350" indent="-514350">
-              <a:buFont typeface="+mj-lt"/>
-              <a:buAutoNum type="arabicPeriod" startAt="2"/>
-            </a:pPr>
-            <a:r>
-              <a:rPr lang="en-IE" b="1" dirty="0"/>
-              <a:t>Writing your own </a:t>
-            </a:r>
-            <a:r>
-              <a:rPr lang="en-IE" dirty="0"/>
-              <a:t>methods:</a:t>
-            </a:r>
-          </a:p>
-          <a:p>
-            <a:pPr lvl="1"/>
-            <a:r>
-              <a:rPr lang="en-IE" dirty="0"/>
-              <a:t>With no parameters</a:t>
-            </a:r>
-          </a:p>
-          <a:p>
-            <a:pPr lvl="1"/>
-            <a:r>
-              <a:rPr lang="en-IE" dirty="0"/>
-              <a:t>With parameters</a:t>
-            </a:r>
-          </a:p>
-          <a:p>
-            <a:pPr lvl="1"/>
-            <a:r>
-              <a:rPr lang="en-IE" dirty="0"/>
-              <a:t>That return data</a:t>
-            </a:r>
-          </a:p>
-          <a:p>
-            <a:pPr marL="0" indent="0">
-              <a:buNone/>
-            </a:pPr>
-            <a:endParaRPr lang="en-IE" dirty="0"/>
-          </a:p>
-        </p:txBody>
-      </p:sp>
-    </p:spTree>
-    <p:extLst>
-      <p:ext uri="{BB962C8B-B14F-4D97-AF65-F5344CB8AC3E}">
-        <p14:creationId xmlns:p14="http://schemas.microsoft.com/office/powerpoint/2010/main" val="1796434878"/>
-      </p:ext>
-    </p:extLst>
-  </p:cSld>
-  <p:clrMapOvr>
-    <a:masterClrMapping/>
-  </p:clrMapOvr>
-</p:sld>
-</file>
-
-<file path=ppt/slides/slide19.xml><?xml version="1.0" encoding="utf-8"?>
 <p:sld xmlns:a="http://schemas.openxmlformats.org/drawingml/2006/main" xmlns:r="http://schemas.openxmlformats.org/officeDocument/2006/relationships" xmlns:p="http://schemas.openxmlformats.org/presentationml/2006/main">
   <p:cSld>
     <p:spTree>
@@ -10857,6 +12304,40 @@
           </a:p>
         </p:txBody>
       </p:sp>
+      <p:sp>
+        <p:nvSpPr>
+          <p:cNvPr id="3" name="Content Placeholder 2"/>
+          <p:cNvSpPr>
+            <a:spLocks noGrp="1"/>
+          </p:cNvSpPr>
+          <p:nvPr>
+            <p:ph idx="1"/>
+          </p:nvPr>
+        </p:nvSpPr>
+        <p:spPr>
+          <a:xfrm>
+            <a:off x="3352800" y="2971801"/>
+            <a:ext cx="8229600" cy="3154363"/>
+          </a:xfrm>
+        </p:spPr>
+        <p:txBody>
+          <a:bodyPr/>
+          <a:lstStyle/>
+          <a:p>
+            <a:r>
+              <a:rPr lang="en-IE" dirty="0"/>
+              <a:t>Write a method that prints a hello message, </a:t>
+            </a:r>
+          </a:p>
+          <a:p>
+            <a:pPr lvl="1"/>
+            <a:r>
+              <a:rPr lang="en-IE" dirty="0"/>
+              <a:t>every time it is called (invoked) it will print the message.</a:t>
+            </a:r>
+          </a:p>
+        </p:txBody>
+      </p:sp>
       <p:pic>
         <p:nvPicPr>
           <p:cNvPr id="8" name="Picture 7">
@@ -10879,7 +12360,7 @@
         </p:blipFill>
         <p:spPr>
           <a:xfrm>
-            <a:off x="228600" y="3253583"/>
+            <a:off x="381000" y="1564666"/>
             <a:ext cx="3592899" cy="1295399"/>
           </a:xfrm>
           <a:prstGeom prst="rect">
@@ -10887,40 +12368,6 @@
           </a:prstGeom>
         </p:spPr>
       </p:pic>
-      <p:sp>
-        <p:nvSpPr>
-          <p:cNvPr id="3" name="Content Placeholder 2"/>
-          <p:cNvSpPr>
-            <a:spLocks noGrp="1"/>
-          </p:cNvSpPr>
-          <p:nvPr>
-            <p:ph idx="1"/>
-          </p:nvPr>
-        </p:nvSpPr>
-        <p:spPr>
-          <a:xfrm>
-            <a:off x="3352800" y="2971801"/>
-            <a:ext cx="8229600" cy="3154363"/>
-          </a:xfrm>
-        </p:spPr>
-        <p:txBody>
-          <a:bodyPr/>
-          <a:lstStyle/>
-          <a:p>
-            <a:r>
-              <a:rPr lang="en-IE" dirty="0"/>
-              <a:t>Write a method that prints a hello message, </a:t>
-            </a:r>
-          </a:p>
-          <a:p>
-            <a:pPr lvl="1"/>
-            <a:r>
-              <a:rPr lang="en-IE" dirty="0"/>
-              <a:t>every time it is called (invoked) it will print the message.</a:t>
-            </a:r>
-          </a:p>
-        </p:txBody>
-      </p:sp>
     </p:spTree>
     <p:extLst>
       <p:ext uri="{BB962C8B-B14F-4D97-AF65-F5344CB8AC3E}">
@@ -10951,298 +12398,66 @@
           <a:chExt cx="0" cy="0"/>
         </a:xfrm>
       </p:grpSpPr>
-      <p:grpSp>
-        <p:nvGrpSpPr>
-          <p:cNvPr id="24" name="Group 23">
+      <p:pic>
+        <p:nvPicPr>
+          <p:cNvPr id="13" name="Picture 12">
             <a:extLst>
               <a:ext uri="{FF2B5EF4-FFF2-40B4-BE49-F238E27FC236}">
-                <a16:creationId xmlns:a16="http://schemas.microsoft.com/office/drawing/2014/main" id="{FCFBBA36-47B0-CECD-CCA1-1C9B25AFCCE3}"/>
+                <a16:creationId xmlns:a16="http://schemas.microsoft.com/office/drawing/2014/main" id="{EAFB6E17-DFFB-5DFD-1B9C-D424A208638A}"/>
               </a:ext>
             </a:extLst>
           </p:cNvPr>
-          <p:cNvGrpSpPr/>
+          <p:cNvPicPr>
+            <a:picLocks noChangeAspect="1"/>
+          </p:cNvPicPr>
           <p:nvPr/>
-        </p:nvGrpSpPr>
-        <p:grpSpPr>
+        </p:nvPicPr>
+        <p:blipFill>
+          <a:blip r:embed="rId3"/>
+          <a:stretch>
+            <a:fillRect/>
+          </a:stretch>
+        </p:blipFill>
+        <p:spPr>
           <a:xfrm>
-            <a:off x="3034357" y="3486424"/>
-            <a:ext cx="9030960" cy="3324689"/>
-            <a:chOff x="3034357" y="3486424"/>
-            <a:chExt cx="9030960" cy="3324689"/>
-          </a:xfrm>
-        </p:grpSpPr>
-        <p:pic>
-          <p:nvPicPr>
-            <p:cNvPr id="22" name="Picture 21">
-              <a:extLst>
-                <a:ext uri="{FF2B5EF4-FFF2-40B4-BE49-F238E27FC236}">
-                  <a16:creationId xmlns:a16="http://schemas.microsoft.com/office/drawing/2014/main" id="{FE96D8E4-80A4-B95E-27E3-CBEC35848705}"/>
-                </a:ext>
-              </a:extLst>
-            </p:cNvPr>
-            <p:cNvPicPr>
-              <a:picLocks noChangeAspect="1"/>
-            </p:cNvPicPr>
-            <p:nvPr/>
-          </p:nvPicPr>
-          <p:blipFill>
-            <a:blip r:embed="rId3"/>
-            <a:stretch>
-              <a:fillRect/>
-            </a:stretch>
-          </p:blipFill>
-          <p:spPr>
-            <a:xfrm>
-              <a:off x="3034357" y="3486424"/>
-              <a:ext cx="9030960" cy="3324689"/>
-            </a:xfrm>
-            <a:prstGeom prst="rect">
-              <a:avLst/>
-            </a:prstGeom>
-            <a:ln w="38100" cap="sq">
-              <a:solidFill>
-                <a:srgbClr val="000000"/>
-              </a:solidFill>
-              <a:prstDash val="solid"/>
-              <a:miter lim="800000"/>
-            </a:ln>
-            <a:effectLst>
-              <a:outerShdw blurRad="50800" dist="38100" dir="2700000" algn="tl" rotWithShape="0">
-                <a:srgbClr val="000000">
-                  <a:alpha val="43000"/>
-                </a:srgbClr>
-              </a:outerShdw>
-            </a:effectLst>
-          </p:spPr>
-        </p:pic>
-        <p:sp>
-          <p:nvSpPr>
-            <p:cNvPr id="23" name="Rectangle 22">
-              <a:extLst>
-                <a:ext uri="{FF2B5EF4-FFF2-40B4-BE49-F238E27FC236}">
-                  <a16:creationId xmlns:a16="http://schemas.microsoft.com/office/drawing/2014/main" id="{84F6F59F-A5AF-B496-2EAA-E19668D84BA7}"/>
-                </a:ext>
-              </a:extLst>
-            </p:cNvPr>
-            <p:cNvSpPr/>
-            <p:nvPr/>
-          </p:nvSpPr>
-          <p:spPr>
-            <a:xfrm>
-              <a:off x="4876800" y="3505200"/>
-              <a:ext cx="4506210" cy="544965"/>
-            </a:xfrm>
-            <a:prstGeom prst="rect">
-              <a:avLst/>
-            </a:prstGeom>
-            <a:solidFill>
-              <a:schemeClr val="bg1"/>
-            </a:solidFill>
-            <a:ln>
-              <a:solidFill>
-                <a:schemeClr val="bg1"/>
-              </a:solidFill>
-            </a:ln>
-          </p:spPr>
-          <p:style>
-            <a:lnRef idx="2">
-              <a:schemeClr val="accent1">
-                <a:shade val="15000"/>
-              </a:schemeClr>
-            </a:lnRef>
-            <a:fillRef idx="1">
-              <a:schemeClr val="accent1"/>
-            </a:fillRef>
-            <a:effectRef idx="0">
-              <a:schemeClr val="accent1"/>
-            </a:effectRef>
-            <a:fontRef idx="minor">
-              <a:schemeClr val="lt1"/>
-            </a:fontRef>
-          </p:style>
-          <p:txBody>
-            <a:bodyPr rtlCol="0" anchor="ctr"/>
-            <a:lstStyle/>
-            <a:p>
-              <a:pPr algn="ctr"/>
-              <a:endParaRPr lang="en-IE"/>
-            </a:p>
-          </p:txBody>
-        </p:sp>
-      </p:grpSp>
-      <p:grpSp>
-        <p:nvGrpSpPr>
-          <p:cNvPr id="20" name="Group 19">
+            <a:off x="3415401" y="3463428"/>
+            <a:ext cx="7772400" cy="3394572"/>
+          </a:xfrm>
+          <a:prstGeom prst="rect">
+            <a:avLst/>
+          </a:prstGeom>
+        </p:spPr>
+      </p:pic>
+      <p:pic>
+        <p:nvPicPr>
+          <p:cNvPr id="3" name="Picture 2">
             <a:extLst>
               <a:ext uri="{FF2B5EF4-FFF2-40B4-BE49-F238E27FC236}">
-                <a16:creationId xmlns:a16="http://schemas.microsoft.com/office/drawing/2014/main" id="{D0B80D84-F67D-4F31-2696-BEE73F7E8E2F}"/>
+                <a16:creationId xmlns:a16="http://schemas.microsoft.com/office/drawing/2014/main" id="{965A9599-EEB1-EFB2-A4E8-645229131484}"/>
               </a:ext>
             </a:extLst>
           </p:cNvPr>
-          <p:cNvGrpSpPr/>
+          <p:cNvPicPr>
+            <a:picLocks noChangeAspect="1"/>
+          </p:cNvPicPr>
           <p:nvPr/>
-        </p:nvGrpSpPr>
-        <p:grpSpPr>
+        </p:nvPicPr>
+        <p:blipFill>
+          <a:blip r:embed="rId4"/>
+          <a:stretch>
+            <a:fillRect/>
+          </a:stretch>
+        </p:blipFill>
+        <p:spPr>
           <a:xfrm>
-            <a:off x="5942834" y="228600"/>
-            <a:ext cx="5487166" cy="3451125"/>
-            <a:chOff x="5942834" y="228600"/>
-            <a:chExt cx="5487166" cy="3451125"/>
-          </a:xfrm>
-        </p:grpSpPr>
-        <p:pic>
-          <p:nvPicPr>
-            <p:cNvPr id="6" name="Picture 5">
-              <a:extLst>
-                <a:ext uri="{FF2B5EF4-FFF2-40B4-BE49-F238E27FC236}">
-                  <a16:creationId xmlns:a16="http://schemas.microsoft.com/office/drawing/2014/main" id="{58E74EA9-627A-F922-E767-54D249F71E19}"/>
-                </a:ext>
-              </a:extLst>
-            </p:cNvPr>
-            <p:cNvPicPr>
-              <a:picLocks noChangeAspect="1"/>
-            </p:cNvPicPr>
-            <p:nvPr/>
-          </p:nvPicPr>
-          <p:blipFill>
-            <a:blip r:embed="rId4"/>
-            <a:stretch>
-              <a:fillRect/>
-            </a:stretch>
-          </p:blipFill>
-          <p:spPr>
-            <a:xfrm>
-              <a:off x="5942834" y="231194"/>
-              <a:ext cx="5487166" cy="3448531"/>
-            </a:xfrm>
-            <a:prstGeom prst="rect">
-              <a:avLst/>
-            </a:prstGeom>
-            <a:ln w="38100" cap="sq">
-              <a:solidFill>
-                <a:srgbClr val="000000"/>
-              </a:solidFill>
-              <a:prstDash val="solid"/>
-              <a:miter lim="800000"/>
-            </a:ln>
-            <a:effectLst>
-              <a:outerShdw blurRad="50800" dist="38100" dir="2700000" algn="tl" rotWithShape="0">
-                <a:srgbClr val="000000">
-                  <a:alpha val="43000"/>
-                </a:srgbClr>
-              </a:outerShdw>
-            </a:effectLst>
-          </p:spPr>
-        </p:pic>
-        <p:sp>
-          <p:nvSpPr>
-            <p:cNvPr id="12" name="Rectangle 11">
-              <a:extLst>
-                <a:ext uri="{FF2B5EF4-FFF2-40B4-BE49-F238E27FC236}">
-                  <a16:creationId xmlns:a16="http://schemas.microsoft.com/office/drawing/2014/main" id="{6FCE5B33-E28F-D547-6D8D-E5F160CD04C5}"/>
-                </a:ext>
-              </a:extLst>
-            </p:cNvPr>
-            <p:cNvSpPr/>
-            <p:nvPr/>
-          </p:nvSpPr>
-          <p:spPr>
-            <a:xfrm>
-              <a:off x="5942834" y="228600"/>
-              <a:ext cx="575056" cy="533400"/>
-            </a:xfrm>
-            <a:prstGeom prst="rect">
-              <a:avLst/>
-            </a:prstGeom>
-            <a:solidFill>
-              <a:schemeClr val="bg1"/>
-            </a:solidFill>
-            <a:ln>
-              <a:solidFill>
-                <a:schemeClr val="bg1"/>
-              </a:solidFill>
-            </a:ln>
-          </p:spPr>
-          <p:style>
-            <a:lnRef idx="2">
-              <a:schemeClr val="accent1">
-                <a:shade val="15000"/>
-              </a:schemeClr>
-            </a:lnRef>
-            <a:fillRef idx="1">
-              <a:schemeClr val="accent1"/>
-            </a:fillRef>
-            <a:effectRef idx="0">
-              <a:schemeClr val="accent1"/>
-            </a:effectRef>
-            <a:fontRef idx="minor">
-              <a:schemeClr val="lt1"/>
-            </a:fontRef>
-          </p:style>
-          <p:txBody>
-            <a:bodyPr rtlCol="0" anchor="ctr"/>
-            <a:lstStyle/>
-            <a:p>
-              <a:pPr algn="ctr"/>
-              <a:endParaRPr lang="en-IE"/>
-            </a:p>
-          </p:txBody>
-        </p:sp>
-        <p:sp>
-          <p:nvSpPr>
-            <p:cNvPr id="17" name="Rectangle 16">
-              <a:extLst>
-                <a:ext uri="{FF2B5EF4-FFF2-40B4-BE49-F238E27FC236}">
-                  <a16:creationId xmlns:a16="http://schemas.microsoft.com/office/drawing/2014/main" id="{854D9A81-F0FA-C79F-6711-6B1B2488F0C4}"/>
-                </a:ext>
-              </a:extLst>
-            </p:cNvPr>
-            <p:cNvSpPr/>
-            <p:nvPr/>
-          </p:nvSpPr>
-          <p:spPr>
-            <a:xfrm>
-              <a:off x="9753600" y="228600"/>
-              <a:ext cx="1556621" cy="533400"/>
-            </a:xfrm>
-            <a:prstGeom prst="rect">
-              <a:avLst/>
-            </a:prstGeom>
-            <a:solidFill>
-              <a:schemeClr val="bg1"/>
-            </a:solidFill>
-            <a:ln>
-              <a:solidFill>
-                <a:schemeClr val="bg1"/>
-              </a:solidFill>
-            </a:ln>
-          </p:spPr>
-          <p:style>
-            <a:lnRef idx="2">
-              <a:schemeClr val="accent1">
-                <a:shade val="15000"/>
-              </a:schemeClr>
-            </a:lnRef>
-            <a:fillRef idx="1">
-              <a:schemeClr val="accent1"/>
-            </a:fillRef>
-            <a:effectRef idx="0">
-              <a:schemeClr val="accent1"/>
-            </a:effectRef>
-            <a:fontRef idx="minor">
-              <a:schemeClr val="lt1"/>
-            </a:fontRef>
-          </p:style>
-          <p:txBody>
-            <a:bodyPr rtlCol="0" anchor="ctr"/>
-            <a:lstStyle/>
-            <a:p>
-              <a:pPr algn="ctr"/>
-              <a:endParaRPr lang="en-IE"/>
-            </a:p>
-          </p:txBody>
-        </p:sp>
-      </p:grpSp>
+            <a:off x="5688701" y="-42173"/>
+            <a:ext cx="6261100" cy="3733800"/>
+          </a:xfrm>
+          <a:prstGeom prst="rect">
+            <a:avLst/>
+          </a:prstGeom>
+        </p:spPr>
+      </p:pic>
       <p:sp>
         <p:nvSpPr>
           <p:cNvPr id="2" name="Title 1"/>
@@ -11265,7 +12480,7 @@
             </a:br>
             <a:r>
               <a:rPr lang="en-IE" b="1" dirty="0"/>
-              <a:t>Example 3.1</a:t>
+              <a:t>Example 1</a:t>
             </a:r>
           </a:p>
         </p:txBody>
@@ -11278,8 +12493,8 @@
         </p:nvSpPr>
         <p:spPr>
           <a:xfrm>
-            <a:off x="6248400" y="1916442"/>
-            <a:ext cx="4944654" cy="1142994"/>
+            <a:off x="6243147" y="1942668"/>
+            <a:ext cx="5618002" cy="1142994"/>
           </a:xfrm>
           <a:prstGeom prst="rect">
             <a:avLst/>
@@ -11324,7 +12539,7 @@
         </p:nvSpPr>
         <p:spPr>
           <a:xfrm>
-            <a:off x="4414143" y="5596110"/>
+            <a:off x="4256141" y="5746700"/>
             <a:ext cx="2865120" cy="304801"/>
           </a:xfrm>
           <a:prstGeom prst="rect">
@@ -11484,13 +12699,15 @@
               </a:ext>
             </a:extLst>
           </p:cNvPr>
-          <p:cNvCxnSpPr/>
+          <p:cNvCxnSpPr>
+            <a:cxnSpLocks/>
+          </p:cNvCxnSpPr>
           <p:nvPr/>
         </p:nvCxnSpPr>
         <p:spPr>
           <a:xfrm>
-            <a:off x="2283292" y="5867400"/>
-            <a:ext cx="670145" cy="0"/>
+            <a:off x="2428782" y="5908388"/>
+            <a:ext cx="1253810" cy="0"/>
           </a:xfrm>
           <a:prstGeom prst="straightConnector1">
             <a:avLst/>
@@ -11574,7 +12791,7 @@
         </p:nvSpPr>
         <p:spPr>
           <a:xfrm>
-            <a:off x="232188" y="4358746"/>
+            <a:off x="326369" y="4714622"/>
             <a:ext cx="2272357" cy="646331"/>
           </a:xfrm>
           <a:prstGeom prst="rect">
@@ -11605,13 +12822,15 @@
               </a:ext>
             </a:extLst>
           </p:cNvPr>
-          <p:cNvCxnSpPr/>
+          <p:cNvCxnSpPr>
+            <a:cxnSpLocks/>
+          </p:cNvCxnSpPr>
           <p:nvPr/>
         </p:nvCxnSpPr>
         <p:spPr>
           <a:xfrm>
-            <a:off x="2364212" y="5039143"/>
-            <a:ext cx="670145" cy="0"/>
+            <a:off x="2428782" y="5377148"/>
+            <a:ext cx="1321691" cy="0"/>
           </a:xfrm>
           <a:prstGeom prst="straightConnector1">
             <a:avLst/>
@@ -12369,7 +13588,7 @@
 </file>
 
 <file path=ppt/theme/theme1.xml><?xml version="1.0" encoding="utf-8"?>
-<a:theme xmlns:a="http://schemas.openxmlformats.org/drawingml/2006/main" name="Office Theme">
+<a:theme xmlns:a="http://schemas.openxmlformats.org/drawingml/2006/main" name="a-processing-mouse-event-methods">
   <a:themeElements>
     <a:clrScheme name="Office">
       <a:dk1>
